--- a/exec-deck/output/H&L PS - Closed Won Not Yet Live - WC 12 Oct 2026.pptx
+++ b/exec-deck/output/H&L PS - Closed Won Not Yet Live - WC 12 Oct 2026.pptx
@@ -1283,7 +1283,7 @@
                 <a:ea typeface="Poppins" pitchFamily="34" charset="-122"/>
                 <a:cs typeface="Poppins" pitchFamily="34" charset="-120"/>
               </a:rPr>
-              <a:t>20</a:t>
+              <a:t>18</a:t>
             </a:r>
             <a:endParaRPr lang="en-US" sz="2600" dirty="0"/>
           </a:p>
@@ -1322,7 +1322,7 @@
                 <a:ea typeface="Poppins" pitchFamily="34" charset="-122"/>
                 <a:cs typeface="Poppins" pitchFamily="34" charset="-120"/>
               </a:rPr>
-              <a:t>of the 95 deals won with recurring revenue in 2026</a:t>
+              <a:t>of the 78 deals won with recurring revenue in 2026</a:t>
             </a:r>
             <a:endParaRPr lang="en-US" sz="780" dirty="0"/>
           </a:p>
@@ -1429,7 +1429,7 @@
                 <a:ea typeface="Poppins" pitchFamily="34" charset="-122"/>
                 <a:cs typeface="Poppins" pitchFamily="34" charset="-120"/>
               </a:rPr>
-              <a:t>$240k</a:t>
+              <a:t>$233k</a:t>
             </a:r>
             <a:endParaRPr lang="en-US" sz="2600" dirty="0"/>
           </a:p>
@@ -1468,7 +1468,7 @@
                 <a:ea typeface="Poppins" pitchFamily="34" charset="-122"/>
                 <a:cs typeface="Poppins" pitchFamily="34" charset="-120"/>
               </a:rPr>
-              <a:t>$20,038/mo signed and not invoiced</a:t>
+              <a:t>$19,450/mo signed and not invoiced</a:t>
             </a:r>
             <a:endParaRPr lang="en-US" sz="780" dirty="0"/>
           </a:p>
@@ -2052,7 +2052,7 @@
         <p:spPr>
           <a:xfrm>
             <a:off x="612648" y="2834640"/>
-            <a:ext cx="2743200" cy="154534"/>
+            <a:ext cx="2743200" cy="162763"/>
           </a:xfrm>
           <a:prstGeom prst="rect">
             <a:avLst/>
@@ -2091,7 +2091,7 @@
         <p:spPr>
           <a:xfrm>
             <a:off x="3374136" y="2834640"/>
-            <a:ext cx="1371600" cy="154534"/>
+            <a:ext cx="1371600" cy="162763"/>
           </a:xfrm>
           <a:prstGeom prst="rect">
             <a:avLst/>
@@ -2130,7 +2130,7 @@
         <p:spPr>
           <a:xfrm>
             <a:off x="4782312" y="2834640"/>
-            <a:ext cx="731520" cy="154534"/>
+            <a:ext cx="731520" cy="162763"/>
           </a:xfrm>
           <a:prstGeom prst="rect">
             <a:avLst/>
@@ -2169,7 +2169,7 @@
         <p:spPr>
           <a:xfrm>
             <a:off x="5532120" y="2834640"/>
-            <a:ext cx="457200" cy="154534"/>
+            <a:ext cx="457200" cy="162763"/>
           </a:xfrm>
           <a:prstGeom prst="rect">
             <a:avLst/>
@@ -2208,7 +2208,7 @@
         <p:spPr>
           <a:xfrm>
             <a:off x="6025896" y="2834640"/>
-            <a:ext cx="768096" cy="154534"/>
+            <a:ext cx="768096" cy="162763"/>
           </a:xfrm>
           <a:prstGeom prst="rect">
             <a:avLst/>
@@ -2246,8 +2246,8 @@
         </p:nvSpPr>
         <p:spPr>
           <a:xfrm>
-            <a:off x="539496" y="2989174"/>
-            <a:ext cx="6419088" cy="154534"/>
+            <a:off x="539496" y="2997403"/>
+            <a:ext cx="6419088" cy="162763"/>
           </a:xfrm>
           <a:prstGeom prst="rect">
             <a:avLst/>
@@ -2266,8 +2266,8 @@
         </p:nvSpPr>
         <p:spPr>
           <a:xfrm>
-            <a:off x="612648" y="2989174"/>
-            <a:ext cx="2743200" cy="154534"/>
+            <a:off x="612648" y="2997403"/>
+            <a:ext cx="2743200" cy="162763"/>
           </a:xfrm>
           <a:prstGeom prst="rect">
             <a:avLst/>
@@ -2305,8 +2305,8 @@
         </p:nvSpPr>
         <p:spPr>
           <a:xfrm>
-            <a:off x="3374136" y="2989174"/>
-            <a:ext cx="1371600" cy="154534"/>
+            <a:off x="3374136" y="2997403"/>
+            <a:ext cx="1371600" cy="162763"/>
           </a:xfrm>
           <a:prstGeom prst="rect">
             <a:avLst/>
@@ -2344,8 +2344,8 @@
         </p:nvSpPr>
         <p:spPr>
           <a:xfrm>
-            <a:off x="4782312" y="2989174"/>
-            <a:ext cx="731520" cy="154534"/>
+            <a:off x="4782312" y="2997403"/>
+            <a:ext cx="731520" cy="162763"/>
           </a:xfrm>
           <a:prstGeom prst="rect">
             <a:avLst/>
@@ -2383,8 +2383,8 @@
         </p:nvSpPr>
         <p:spPr>
           <a:xfrm>
-            <a:off x="5532120" y="2989174"/>
-            <a:ext cx="457200" cy="154534"/>
+            <a:off x="5532120" y="2997403"/>
+            <a:ext cx="457200" cy="162763"/>
           </a:xfrm>
           <a:prstGeom prst="rect">
             <a:avLst/>
@@ -2422,8 +2422,8 @@
         </p:nvSpPr>
         <p:spPr>
           <a:xfrm>
-            <a:off x="6025896" y="2989174"/>
-            <a:ext cx="768096" cy="154534"/>
+            <a:off x="6025896" y="2997403"/>
+            <a:ext cx="768096" cy="162763"/>
           </a:xfrm>
           <a:prstGeom prst="rect">
             <a:avLst/>
@@ -2461,8 +2461,8 @@
         </p:nvSpPr>
         <p:spPr>
           <a:xfrm>
-            <a:off x="612648" y="3143707"/>
-            <a:ext cx="2743200" cy="154534"/>
+            <a:off x="612648" y="3160166"/>
+            <a:ext cx="2743200" cy="162763"/>
           </a:xfrm>
           <a:prstGeom prst="rect">
             <a:avLst/>
@@ -2500,8 +2500,8 @@
         </p:nvSpPr>
         <p:spPr>
           <a:xfrm>
-            <a:off x="3374136" y="3143707"/>
-            <a:ext cx="1371600" cy="154534"/>
+            <a:off x="3374136" y="3160166"/>
+            <a:ext cx="1371600" cy="162763"/>
           </a:xfrm>
           <a:prstGeom prst="rect">
             <a:avLst/>
@@ -2539,8 +2539,8 @@
         </p:nvSpPr>
         <p:spPr>
           <a:xfrm>
-            <a:off x="4782312" y="3143707"/>
-            <a:ext cx="731520" cy="154534"/>
+            <a:off x="4782312" y="3160166"/>
+            <a:ext cx="731520" cy="162763"/>
           </a:xfrm>
           <a:prstGeom prst="rect">
             <a:avLst/>
@@ -2578,8 +2578,8 @@
         </p:nvSpPr>
         <p:spPr>
           <a:xfrm>
-            <a:off x="5532120" y="3143707"/>
-            <a:ext cx="457200" cy="154534"/>
+            <a:off x="5532120" y="3160166"/>
+            <a:ext cx="457200" cy="162763"/>
           </a:xfrm>
           <a:prstGeom prst="rect">
             <a:avLst/>
@@ -2617,8 +2617,8 @@
         </p:nvSpPr>
         <p:spPr>
           <a:xfrm>
-            <a:off x="6025896" y="3143707"/>
-            <a:ext cx="768096" cy="154534"/>
+            <a:off x="6025896" y="3160166"/>
+            <a:ext cx="768096" cy="162763"/>
           </a:xfrm>
           <a:prstGeom prst="rect">
             <a:avLst/>
@@ -2656,8 +2656,8 @@
         </p:nvSpPr>
         <p:spPr>
           <a:xfrm>
-            <a:off x="539496" y="3298241"/>
-            <a:ext cx="6419088" cy="154534"/>
+            <a:off x="539496" y="3322930"/>
+            <a:ext cx="6419088" cy="162763"/>
           </a:xfrm>
           <a:prstGeom prst="rect">
             <a:avLst/>
@@ -2676,8 +2676,8 @@
         </p:nvSpPr>
         <p:spPr>
           <a:xfrm>
-            <a:off x="612648" y="3298241"/>
-            <a:ext cx="2743200" cy="154534"/>
+            <a:off x="612648" y="3322930"/>
+            <a:ext cx="2743200" cy="162763"/>
           </a:xfrm>
           <a:prstGeom prst="rect">
             <a:avLst/>
@@ -2715,8 +2715,8 @@
         </p:nvSpPr>
         <p:spPr>
           <a:xfrm>
-            <a:off x="3374136" y="3298241"/>
-            <a:ext cx="1371600" cy="154534"/>
+            <a:off x="3374136" y="3322930"/>
+            <a:ext cx="1371600" cy="162763"/>
           </a:xfrm>
           <a:prstGeom prst="rect">
             <a:avLst/>
@@ -2754,8 +2754,8 @@
         </p:nvSpPr>
         <p:spPr>
           <a:xfrm>
-            <a:off x="4782312" y="3298241"/>
-            <a:ext cx="731520" cy="154534"/>
+            <a:off x="4782312" y="3322930"/>
+            <a:ext cx="731520" cy="162763"/>
           </a:xfrm>
           <a:prstGeom prst="rect">
             <a:avLst/>
@@ -2793,8 +2793,8 @@
         </p:nvSpPr>
         <p:spPr>
           <a:xfrm>
-            <a:off x="5532120" y="3298241"/>
-            <a:ext cx="457200" cy="154534"/>
+            <a:off x="5532120" y="3322930"/>
+            <a:ext cx="457200" cy="162763"/>
           </a:xfrm>
           <a:prstGeom prst="rect">
             <a:avLst/>
@@ -2832,8 +2832,8 @@
         </p:nvSpPr>
         <p:spPr>
           <a:xfrm>
-            <a:off x="6025896" y="3298241"/>
-            <a:ext cx="768096" cy="154534"/>
+            <a:off x="6025896" y="3322930"/>
+            <a:ext cx="768096" cy="162763"/>
           </a:xfrm>
           <a:prstGeom prst="rect">
             <a:avLst/>
@@ -2871,8 +2871,8 @@
         </p:nvSpPr>
         <p:spPr>
           <a:xfrm>
-            <a:off x="612648" y="3452774"/>
-            <a:ext cx="2743200" cy="154534"/>
+            <a:off x="612648" y="3485693"/>
+            <a:ext cx="2743200" cy="162763"/>
           </a:xfrm>
           <a:prstGeom prst="rect">
             <a:avLst/>
@@ -2910,8 +2910,8 @@
         </p:nvSpPr>
         <p:spPr>
           <a:xfrm>
-            <a:off x="3374136" y="3452774"/>
-            <a:ext cx="1371600" cy="154534"/>
+            <a:off x="3374136" y="3485693"/>
+            <a:ext cx="1371600" cy="162763"/>
           </a:xfrm>
           <a:prstGeom prst="rect">
             <a:avLst/>
@@ -2949,8 +2949,8 @@
         </p:nvSpPr>
         <p:spPr>
           <a:xfrm>
-            <a:off x="4782312" y="3452774"/>
-            <a:ext cx="731520" cy="154534"/>
+            <a:off x="4782312" y="3485693"/>
+            <a:ext cx="731520" cy="162763"/>
           </a:xfrm>
           <a:prstGeom prst="rect">
             <a:avLst/>
@@ -2988,8 +2988,8 @@
         </p:nvSpPr>
         <p:spPr>
           <a:xfrm>
-            <a:off x="5532120" y="3452774"/>
-            <a:ext cx="457200" cy="154534"/>
+            <a:off x="5532120" y="3485693"/>
+            <a:ext cx="457200" cy="162763"/>
           </a:xfrm>
           <a:prstGeom prst="rect">
             <a:avLst/>
@@ -3027,8 +3027,8 @@
         </p:nvSpPr>
         <p:spPr>
           <a:xfrm>
-            <a:off x="6025896" y="3452774"/>
-            <a:ext cx="768096" cy="154534"/>
+            <a:off x="6025896" y="3485693"/>
+            <a:ext cx="768096" cy="162763"/>
           </a:xfrm>
           <a:prstGeom prst="rect">
             <a:avLst/>
@@ -3066,8 +3066,8 @@
         </p:nvSpPr>
         <p:spPr>
           <a:xfrm>
-            <a:off x="539496" y="3607308"/>
-            <a:ext cx="6419088" cy="154534"/>
+            <a:off x="539496" y="3648456"/>
+            <a:ext cx="6419088" cy="162763"/>
           </a:xfrm>
           <a:prstGeom prst="rect">
             <a:avLst/>
@@ -3086,8 +3086,8 @@
         </p:nvSpPr>
         <p:spPr>
           <a:xfrm>
-            <a:off x="612648" y="3607308"/>
-            <a:ext cx="2743200" cy="154534"/>
+            <a:off x="612648" y="3648456"/>
+            <a:ext cx="2743200" cy="162763"/>
           </a:xfrm>
           <a:prstGeom prst="rect">
             <a:avLst/>
@@ -3125,8 +3125,8 @@
         </p:nvSpPr>
         <p:spPr>
           <a:xfrm>
-            <a:off x="3374136" y="3607308"/>
-            <a:ext cx="1371600" cy="154534"/>
+            <a:off x="3374136" y="3648456"/>
+            <a:ext cx="1371600" cy="162763"/>
           </a:xfrm>
           <a:prstGeom prst="rect">
             <a:avLst/>
@@ -3164,8 +3164,8 @@
         </p:nvSpPr>
         <p:spPr>
           <a:xfrm>
-            <a:off x="4782312" y="3607308"/>
-            <a:ext cx="731520" cy="154534"/>
+            <a:off x="4782312" y="3648456"/>
+            <a:ext cx="731520" cy="162763"/>
           </a:xfrm>
           <a:prstGeom prst="rect">
             <a:avLst/>
@@ -3203,8 +3203,8 @@
         </p:nvSpPr>
         <p:spPr>
           <a:xfrm>
-            <a:off x="5532120" y="3607308"/>
-            <a:ext cx="457200" cy="154534"/>
+            <a:off x="5532120" y="3648456"/>
+            <a:ext cx="457200" cy="162763"/>
           </a:xfrm>
           <a:prstGeom prst="rect">
             <a:avLst/>
@@ -3242,8 +3242,8 @@
         </p:nvSpPr>
         <p:spPr>
           <a:xfrm>
-            <a:off x="6025896" y="3607308"/>
-            <a:ext cx="768096" cy="154534"/>
+            <a:off x="6025896" y="3648456"/>
+            <a:ext cx="768096" cy="162763"/>
           </a:xfrm>
           <a:prstGeom prst="rect">
             <a:avLst/>
@@ -3281,8 +3281,8 @@
         </p:nvSpPr>
         <p:spPr>
           <a:xfrm>
-            <a:off x="612648" y="3761842"/>
-            <a:ext cx="2743200" cy="154534"/>
+            <a:off x="612648" y="3811219"/>
+            <a:ext cx="2743200" cy="162763"/>
           </a:xfrm>
           <a:prstGeom prst="rect">
             <a:avLst/>
@@ -3320,8 +3320,8 @@
         </p:nvSpPr>
         <p:spPr>
           <a:xfrm>
-            <a:off x="3374136" y="3761842"/>
-            <a:ext cx="1371600" cy="154534"/>
+            <a:off x="3374136" y="3811219"/>
+            <a:ext cx="1371600" cy="162763"/>
           </a:xfrm>
           <a:prstGeom prst="rect">
             <a:avLst/>
@@ -3359,8 +3359,8 @@
         </p:nvSpPr>
         <p:spPr>
           <a:xfrm>
-            <a:off x="4782312" y="3761842"/>
-            <a:ext cx="731520" cy="154534"/>
+            <a:off x="4782312" y="3811219"/>
+            <a:ext cx="731520" cy="162763"/>
           </a:xfrm>
           <a:prstGeom prst="rect">
             <a:avLst/>
@@ -3398,8 +3398,8 @@
         </p:nvSpPr>
         <p:spPr>
           <a:xfrm>
-            <a:off x="5532120" y="3761842"/>
-            <a:ext cx="457200" cy="154534"/>
+            <a:off x="5532120" y="3811219"/>
+            <a:ext cx="457200" cy="162763"/>
           </a:xfrm>
           <a:prstGeom prst="rect">
             <a:avLst/>
@@ -3437,8 +3437,8 @@
         </p:nvSpPr>
         <p:spPr>
           <a:xfrm>
-            <a:off x="6025896" y="3761842"/>
-            <a:ext cx="768096" cy="154534"/>
+            <a:off x="6025896" y="3811219"/>
+            <a:ext cx="768096" cy="162763"/>
           </a:xfrm>
           <a:prstGeom prst="rect">
             <a:avLst/>
@@ -3476,8 +3476,8 @@
         </p:nvSpPr>
         <p:spPr>
           <a:xfrm>
-            <a:off x="539496" y="3916375"/>
-            <a:ext cx="6419088" cy="154534"/>
+            <a:off x="539496" y="3973982"/>
+            <a:ext cx="6419088" cy="162763"/>
           </a:xfrm>
           <a:prstGeom prst="rect">
             <a:avLst/>
@@ -3496,8 +3496,8 @@
         </p:nvSpPr>
         <p:spPr>
           <a:xfrm>
-            <a:off x="612648" y="3916375"/>
-            <a:ext cx="2743200" cy="154534"/>
+            <a:off x="612648" y="3973982"/>
+            <a:ext cx="2743200" cy="162763"/>
           </a:xfrm>
           <a:prstGeom prst="rect">
             <a:avLst/>
@@ -3535,8 +3535,8 @@
         </p:nvSpPr>
         <p:spPr>
           <a:xfrm>
-            <a:off x="3374136" y="3916375"/>
-            <a:ext cx="1371600" cy="154534"/>
+            <a:off x="3374136" y="3973982"/>
+            <a:ext cx="1371600" cy="162763"/>
           </a:xfrm>
           <a:prstGeom prst="rect">
             <a:avLst/>
@@ -3574,8 +3574,8 @@
         </p:nvSpPr>
         <p:spPr>
           <a:xfrm>
-            <a:off x="4782312" y="3916375"/>
-            <a:ext cx="731520" cy="154534"/>
+            <a:off x="4782312" y="3973982"/>
+            <a:ext cx="731520" cy="162763"/>
           </a:xfrm>
           <a:prstGeom prst="rect">
             <a:avLst/>
@@ -3613,8 +3613,8 @@
         </p:nvSpPr>
         <p:spPr>
           <a:xfrm>
-            <a:off x="5532120" y="3916375"/>
-            <a:ext cx="457200" cy="154534"/>
+            <a:off x="5532120" y="3973982"/>
+            <a:ext cx="457200" cy="162763"/>
           </a:xfrm>
           <a:prstGeom prst="rect">
             <a:avLst/>
@@ -3652,8 +3652,8 @@
         </p:nvSpPr>
         <p:spPr>
           <a:xfrm>
-            <a:off x="6025896" y="3916375"/>
-            <a:ext cx="768096" cy="154534"/>
+            <a:off x="6025896" y="3973982"/>
+            <a:ext cx="768096" cy="162763"/>
           </a:xfrm>
           <a:prstGeom prst="rect">
             <a:avLst/>
@@ -3691,8 +3691,8 @@
         </p:nvSpPr>
         <p:spPr>
           <a:xfrm>
-            <a:off x="612648" y="4070909"/>
-            <a:ext cx="2743200" cy="154534"/>
+            <a:off x="612648" y="4136746"/>
+            <a:ext cx="2743200" cy="162763"/>
           </a:xfrm>
           <a:prstGeom prst="rect">
             <a:avLst/>
@@ -3730,8 +3730,8 @@
         </p:nvSpPr>
         <p:spPr>
           <a:xfrm>
-            <a:off x="3374136" y="4070909"/>
-            <a:ext cx="1371600" cy="154534"/>
+            <a:off x="3374136" y="4136746"/>
+            <a:ext cx="1371600" cy="162763"/>
           </a:xfrm>
           <a:prstGeom prst="rect">
             <a:avLst/>
@@ -3769,8 +3769,8 @@
         </p:nvSpPr>
         <p:spPr>
           <a:xfrm>
-            <a:off x="4782312" y="4070909"/>
-            <a:ext cx="731520" cy="154534"/>
+            <a:off x="4782312" y="4136746"/>
+            <a:ext cx="731520" cy="162763"/>
           </a:xfrm>
           <a:prstGeom prst="rect">
             <a:avLst/>
@@ -3808,8 +3808,8 @@
         </p:nvSpPr>
         <p:spPr>
           <a:xfrm>
-            <a:off x="5532120" y="4070909"/>
-            <a:ext cx="457200" cy="154534"/>
+            <a:off x="5532120" y="4136746"/>
+            <a:ext cx="457200" cy="162763"/>
           </a:xfrm>
           <a:prstGeom prst="rect">
             <a:avLst/>
@@ -3847,8 +3847,8 @@
         </p:nvSpPr>
         <p:spPr>
           <a:xfrm>
-            <a:off x="6025896" y="4070909"/>
-            <a:ext cx="768096" cy="154534"/>
+            <a:off x="6025896" y="4136746"/>
+            <a:ext cx="768096" cy="162763"/>
           </a:xfrm>
           <a:prstGeom prst="rect">
             <a:avLst/>
@@ -3886,8 +3886,8 @@
         </p:nvSpPr>
         <p:spPr>
           <a:xfrm>
-            <a:off x="539496" y="4225442"/>
-            <a:ext cx="6419088" cy="154534"/>
+            <a:off x="539496" y="4299509"/>
+            <a:ext cx="6419088" cy="162763"/>
           </a:xfrm>
           <a:prstGeom prst="rect">
             <a:avLst/>
@@ -3906,8 +3906,8 @@
         </p:nvSpPr>
         <p:spPr>
           <a:xfrm>
-            <a:off x="612648" y="4225442"/>
-            <a:ext cx="2743200" cy="154534"/>
+            <a:off x="612648" y="4299509"/>
+            <a:ext cx="2743200" cy="162763"/>
           </a:xfrm>
           <a:prstGeom prst="rect">
             <a:avLst/>
@@ -3945,8 +3945,8 @@
         </p:nvSpPr>
         <p:spPr>
           <a:xfrm>
-            <a:off x="3374136" y="4225442"/>
-            <a:ext cx="1371600" cy="154534"/>
+            <a:off x="3374136" y="4299509"/>
+            <a:ext cx="1371600" cy="162763"/>
           </a:xfrm>
           <a:prstGeom prst="rect">
             <a:avLst/>
@@ -3984,8 +3984,8 @@
         </p:nvSpPr>
         <p:spPr>
           <a:xfrm>
-            <a:off x="4782312" y="4225442"/>
-            <a:ext cx="731520" cy="154534"/>
+            <a:off x="4782312" y="4299509"/>
+            <a:ext cx="731520" cy="162763"/>
           </a:xfrm>
           <a:prstGeom prst="rect">
             <a:avLst/>
@@ -4023,8 +4023,8 @@
         </p:nvSpPr>
         <p:spPr>
           <a:xfrm>
-            <a:off x="5532120" y="4225442"/>
-            <a:ext cx="457200" cy="154534"/>
+            <a:off x="5532120" y="4299509"/>
+            <a:ext cx="457200" cy="162763"/>
           </a:xfrm>
           <a:prstGeom prst="rect">
             <a:avLst/>
@@ -4062,8 +4062,8 @@
         </p:nvSpPr>
         <p:spPr>
           <a:xfrm>
-            <a:off x="6025896" y="4225442"/>
-            <a:ext cx="768096" cy="154534"/>
+            <a:off x="6025896" y="4299509"/>
+            <a:ext cx="768096" cy="162763"/>
           </a:xfrm>
           <a:prstGeom prst="rect">
             <a:avLst/>
@@ -4101,8 +4101,8 @@
         </p:nvSpPr>
         <p:spPr>
           <a:xfrm>
-            <a:off x="612648" y="4379976"/>
-            <a:ext cx="2743200" cy="154534"/>
+            <a:off x="612648" y="4462272"/>
+            <a:ext cx="2743200" cy="162763"/>
           </a:xfrm>
           <a:prstGeom prst="rect">
             <a:avLst/>
@@ -4140,8 +4140,8 @@
         </p:nvSpPr>
         <p:spPr>
           <a:xfrm>
-            <a:off x="3374136" y="4379976"/>
-            <a:ext cx="1371600" cy="154534"/>
+            <a:off x="3374136" y="4462272"/>
+            <a:ext cx="1371600" cy="162763"/>
           </a:xfrm>
           <a:prstGeom prst="rect">
             <a:avLst/>
@@ -4179,8 +4179,8 @@
         </p:nvSpPr>
         <p:spPr>
           <a:xfrm>
-            <a:off x="4782312" y="4379976"/>
-            <a:ext cx="731520" cy="154534"/>
+            <a:off x="4782312" y="4462272"/>
+            <a:ext cx="731520" cy="162763"/>
           </a:xfrm>
           <a:prstGeom prst="rect">
             <a:avLst/>
@@ -4218,8 +4218,8 @@
         </p:nvSpPr>
         <p:spPr>
           <a:xfrm>
-            <a:off x="5532120" y="4379976"/>
-            <a:ext cx="457200" cy="154534"/>
+            <a:off x="5532120" y="4462272"/>
+            <a:ext cx="457200" cy="162763"/>
           </a:xfrm>
           <a:prstGeom prst="rect">
             <a:avLst/>
@@ -4257,8 +4257,8 @@
         </p:nvSpPr>
         <p:spPr>
           <a:xfrm>
-            <a:off x="6025896" y="4379976"/>
-            <a:ext cx="768096" cy="154534"/>
+            <a:off x="6025896" y="4462272"/>
+            <a:ext cx="768096" cy="162763"/>
           </a:xfrm>
           <a:prstGeom prst="rect">
             <a:avLst/>
@@ -4296,8 +4296,8 @@
         </p:nvSpPr>
         <p:spPr>
           <a:xfrm>
-            <a:off x="539496" y="4534510"/>
-            <a:ext cx="6419088" cy="154534"/>
+            <a:off x="539496" y="4625035"/>
+            <a:ext cx="6419088" cy="162763"/>
           </a:xfrm>
           <a:prstGeom prst="rect">
             <a:avLst/>
@@ -4316,8 +4316,8 @@
         </p:nvSpPr>
         <p:spPr>
           <a:xfrm>
-            <a:off x="612648" y="4534510"/>
-            <a:ext cx="2743200" cy="154534"/>
+            <a:off x="612648" y="4625035"/>
+            <a:ext cx="2743200" cy="162763"/>
           </a:xfrm>
           <a:prstGeom prst="rect">
             <a:avLst/>
@@ -4355,8 +4355,8 @@
         </p:nvSpPr>
         <p:spPr>
           <a:xfrm>
-            <a:off x="3374136" y="4534510"/>
-            <a:ext cx="1371600" cy="154534"/>
+            <a:off x="3374136" y="4625035"/>
+            <a:ext cx="1371600" cy="162763"/>
           </a:xfrm>
           <a:prstGeom prst="rect">
             <a:avLst/>
@@ -4394,8 +4394,8 @@
         </p:nvSpPr>
         <p:spPr>
           <a:xfrm>
-            <a:off x="4782312" y="4534510"/>
-            <a:ext cx="731520" cy="154534"/>
+            <a:off x="4782312" y="4625035"/>
+            <a:ext cx="731520" cy="162763"/>
           </a:xfrm>
           <a:prstGeom prst="rect">
             <a:avLst/>
@@ -4433,8 +4433,8 @@
         </p:nvSpPr>
         <p:spPr>
           <a:xfrm>
-            <a:off x="5532120" y="4534510"/>
-            <a:ext cx="457200" cy="154534"/>
+            <a:off x="5532120" y="4625035"/>
+            <a:ext cx="457200" cy="162763"/>
           </a:xfrm>
           <a:prstGeom prst="rect">
             <a:avLst/>
@@ -4472,8 +4472,8 @@
         </p:nvSpPr>
         <p:spPr>
           <a:xfrm>
-            <a:off x="6025896" y="4534510"/>
-            <a:ext cx="768096" cy="154534"/>
+            <a:off x="6025896" y="4625035"/>
+            <a:ext cx="768096" cy="162763"/>
           </a:xfrm>
           <a:prstGeom prst="rect">
             <a:avLst/>
@@ -4511,8 +4511,8 @@
         </p:nvSpPr>
         <p:spPr>
           <a:xfrm>
-            <a:off x="612648" y="4689043"/>
-            <a:ext cx="2743200" cy="154534"/>
+            <a:off x="612648" y="4787798"/>
+            <a:ext cx="2743200" cy="162763"/>
           </a:xfrm>
           <a:prstGeom prst="rect">
             <a:avLst/>
@@ -4536,7 +4536,7 @@
                 <a:ea typeface="Poppins" pitchFamily="34" charset="-122"/>
                 <a:cs typeface="Poppins" pitchFamily="34" charset="-120"/>
               </a:rPr>
-              <a:t>AVC - Bellevue Bar &amp; Terrace</a:t>
+              <a:t>Wayi Restaurant</a:t>
             </a:r>
             <a:endParaRPr lang="en-US" sz="720" dirty="0"/>
           </a:p>
@@ -4550,8 +4550,8 @@
         </p:nvSpPr>
         <p:spPr>
           <a:xfrm>
-            <a:off x="3374136" y="4689043"/>
-            <a:ext cx="1371600" cy="154534"/>
+            <a:off x="3374136" y="4787798"/>
+            <a:ext cx="1371600" cy="162763"/>
           </a:xfrm>
           <a:prstGeom prst="rect">
             <a:avLst/>
@@ -4589,8 +4589,8 @@
         </p:nvSpPr>
         <p:spPr>
           <a:xfrm>
-            <a:off x="4782312" y="4689043"/>
-            <a:ext cx="731520" cy="154534"/>
+            <a:off x="4782312" y="4787798"/>
+            <a:ext cx="731520" cy="162763"/>
           </a:xfrm>
           <a:prstGeom prst="rect">
             <a:avLst/>
@@ -4614,7 +4614,7 @@
                 <a:ea typeface="Poppins" pitchFamily="34" charset="-122"/>
                 <a:cs typeface="Poppins" pitchFamily="34" charset="-120"/>
               </a:rPr>
-              <a:t>15 Oct</a:t>
+              <a:t>17 Sep</a:t>
             </a:r>
             <a:endParaRPr lang="en-US" sz="700" dirty="0"/>
           </a:p>
@@ -4628,8 +4628,8 @@
         </p:nvSpPr>
         <p:spPr>
           <a:xfrm>
-            <a:off x="5532120" y="4689043"/>
-            <a:ext cx="457200" cy="154534"/>
+            <a:off x="5532120" y="4787798"/>
+            <a:ext cx="457200" cy="162763"/>
           </a:xfrm>
           <a:prstGeom prst="rect">
             <a:avLst/>
@@ -4653,7 +4653,7 @@
                 <a:ea typeface="Poppins" pitchFamily="34" charset="-122"/>
                 <a:cs typeface="Poppins" pitchFamily="34" charset="-120"/>
               </a:rPr>
-              <a:t>3</a:t>
+              <a:t>31</a:t>
             </a:r>
             <a:endParaRPr lang="en-US" sz="720" dirty="0"/>
           </a:p>
@@ -4667,8 +4667,8 @@
         </p:nvSpPr>
         <p:spPr>
           <a:xfrm>
-            <a:off x="6025896" y="4689043"/>
-            <a:ext cx="768096" cy="154534"/>
+            <a:off x="6025896" y="4787798"/>
+            <a:ext cx="768096" cy="162763"/>
           </a:xfrm>
           <a:prstGeom prst="rect">
             <a:avLst/>
@@ -4692,7 +4692,7 @@
                 <a:ea typeface="Poppins" pitchFamily="34" charset="-122"/>
                 <a:cs typeface="Poppins" pitchFamily="34" charset="-120"/>
               </a:rPr>
-              <a:t>$294</a:t>
+              <a:t>$250</a:t>
             </a:r>
             <a:endParaRPr lang="en-US" sz="720" dirty="0"/>
           </a:p>
@@ -4706,8 +4706,8 @@
         </p:nvSpPr>
         <p:spPr>
           <a:xfrm>
-            <a:off x="539496" y="4843577"/>
-            <a:ext cx="6419088" cy="154534"/>
+            <a:off x="539496" y="4950562"/>
+            <a:ext cx="6419088" cy="162763"/>
           </a:xfrm>
           <a:prstGeom prst="rect">
             <a:avLst/>
@@ -4726,8 +4726,203 @@
         </p:nvSpPr>
         <p:spPr>
           <a:xfrm>
-            <a:off x="612648" y="4843577"/>
-            <a:ext cx="2743200" cy="154534"/>
+            <a:off x="612648" y="4950562"/>
+            <a:ext cx="2743200" cy="162763"/>
+          </a:xfrm>
+          <a:prstGeom prst="rect">
+            <a:avLst/>
+          </a:prstGeom>
+          <a:noFill/>
+          <a:ln/>
+        </p:spPr>
+        <p:txBody>
+          <a:bodyPr wrap="square" lIns="0" tIns="0" rIns="0" bIns="0" rtlCol="0" anchor="ctr"/>
+          <a:lstStyle/>
+          <a:p>
+            <a:pPr indent="0" marL="0">
+              <a:buNone/>
+            </a:pPr>
+            <a:r>
+              <a:rPr lang="en-US" sz="720" b="1" dirty="0">
+                <a:solidFill>
+                  <a:srgbClr val="12293A"/>
+                </a:solidFill>
+                <a:latin typeface="Poppins" pitchFamily="34" charset="0"/>
+                <a:ea typeface="Poppins" pitchFamily="34" charset="-122"/>
+                <a:cs typeface="Poppins" pitchFamily="34" charset="-120"/>
+              </a:rPr>
+              <a:t>Kirra Beach House</a:t>
+            </a:r>
+            <a:endParaRPr lang="en-US" sz="720" dirty="0"/>
+          </a:p>
+        </p:txBody>
+      </p:sp>
+      <p:sp>
+        <p:nvSpPr>
+          <p:cNvPr id="109" name="Text 107"/>
+          <p:cNvSpPr txBox="1"/>
+          <p:nvPr/>
+        </p:nvSpPr>
+        <p:spPr>
+          <a:xfrm>
+            <a:off x="3374136" y="4950562"/>
+            <a:ext cx="1371600" cy="162763"/>
+          </a:xfrm>
+          <a:prstGeom prst="rect">
+            <a:avLst/>
+          </a:prstGeom>
+          <a:noFill/>
+          <a:ln/>
+        </p:spPr>
+        <p:txBody>
+          <a:bodyPr wrap="square" lIns="0" tIns="0" rIns="0" bIns="0" rtlCol="0" anchor="ctr"/>
+          <a:lstStyle/>
+          <a:p>
+            <a:pPr indent="0" marL="0">
+              <a:buNone/>
+            </a:pPr>
+            <a:r>
+              <a:rPr lang="en-US" sz="700" dirty="0">
+                <a:solidFill>
+                  <a:srgbClr val="5E7280"/>
+                </a:solidFill>
+                <a:latin typeface="Poppins" pitchFamily="34" charset="0"/>
+                <a:ea typeface="Poppins" pitchFamily="34" charset="-122"/>
+                <a:cs typeface="Poppins" pitchFamily="34" charset="-120"/>
+              </a:rPr>
+              <a:t>Brett Gorman</a:t>
+            </a:r>
+            <a:endParaRPr lang="en-US" sz="700" dirty="0"/>
+          </a:p>
+        </p:txBody>
+      </p:sp>
+      <p:sp>
+        <p:nvSpPr>
+          <p:cNvPr id="110" name="Text 108"/>
+          <p:cNvSpPr txBox="1"/>
+          <p:nvPr/>
+        </p:nvSpPr>
+        <p:spPr>
+          <a:xfrm>
+            <a:off x="4782312" y="4950562"/>
+            <a:ext cx="731520" cy="162763"/>
+          </a:xfrm>
+          <a:prstGeom prst="rect">
+            <a:avLst/>
+          </a:prstGeom>
+          <a:noFill/>
+          <a:ln/>
+        </p:spPr>
+        <p:txBody>
+          <a:bodyPr wrap="square" lIns="0" tIns="0" rIns="0" bIns="0" rtlCol="0" anchor="ctr"/>
+          <a:lstStyle/>
+          <a:p>
+            <a:pPr indent="0" marL="0">
+              <a:buNone/>
+            </a:pPr>
+            <a:r>
+              <a:rPr lang="en-US" sz="700" dirty="0">
+                <a:solidFill>
+                  <a:srgbClr val="8FA1AC"/>
+                </a:solidFill>
+                <a:latin typeface="Poppins" pitchFamily="34" charset="0"/>
+                <a:ea typeface="Poppins" pitchFamily="34" charset="-122"/>
+                <a:cs typeface="Poppins" pitchFamily="34" charset="-120"/>
+              </a:rPr>
+              <a:t>8 Jun</a:t>
+            </a:r>
+            <a:endParaRPr lang="en-US" sz="700" dirty="0"/>
+          </a:p>
+        </p:txBody>
+      </p:sp>
+      <p:sp>
+        <p:nvSpPr>
+          <p:cNvPr id="111" name="Text 109"/>
+          <p:cNvSpPr txBox="1"/>
+          <p:nvPr/>
+        </p:nvSpPr>
+        <p:spPr>
+          <a:xfrm>
+            <a:off x="5532120" y="4950562"/>
+            <a:ext cx="457200" cy="162763"/>
+          </a:xfrm>
+          <a:prstGeom prst="rect">
+            <a:avLst/>
+          </a:prstGeom>
+          <a:noFill/>
+          <a:ln/>
+        </p:spPr>
+        <p:txBody>
+          <a:bodyPr wrap="square" lIns="0" tIns="0" rIns="0" bIns="0" rtlCol="0" anchor="ctr"/>
+          <a:lstStyle/>
+          <a:p>
+            <a:pPr algn="r" indent="0" marL="0">
+              <a:buNone/>
+            </a:pPr>
+            <a:r>
+              <a:rPr lang="en-US" sz="720" b="1" dirty="0">
+                <a:solidFill>
+                  <a:srgbClr val="C88A2E"/>
+                </a:solidFill>
+                <a:latin typeface="Poppins" pitchFamily="34" charset="0"/>
+                <a:ea typeface="Poppins" pitchFamily="34" charset="-122"/>
+                <a:cs typeface="Poppins" pitchFamily="34" charset="-120"/>
+              </a:rPr>
+              <a:t>132</a:t>
+            </a:r>
+            <a:endParaRPr lang="en-US" sz="720" dirty="0"/>
+          </a:p>
+        </p:txBody>
+      </p:sp>
+      <p:sp>
+        <p:nvSpPr>
+          <p:cNvPr id="112" name="Text 110"/>
+          <p:cNvSpPr txBox="1"/>
+          <p:nvPr/>
+        </p:nvSpPr>
+        <p:spPr>
+          <a:xfrm>
+            <a:off x="6025896" y="4950562"/>
+            <a:ext cx="768096" cy="162763"/>
+          </a:xfrm>
+          <a:prstGeom prst="rect">
+            <a:avLst/>
+          </a:prstGeom>
+          <a:noFill/>
+          <a:ln/>
+        </p:spPr>
+        <p:txBody>
+          <a:bodyPr wrap="square" lIns="0" tIns="0" rIns="0" bIns="0" rtlCol="0" anchor="ctr"/>
+          <a:lstStyle/>
+          <a:p>
+            <a:pPr algn="r" indent="0" marL="0">
+              <a:buNone/>
+            </a:pPr>
+            <a:r>
+              <a:rPr lang="en-US" sz="720" b="1" dirty="0">
+                <a:solidFill>
+                  <a:srgbClr val="12293A"/>
+                </a:solidFill>
+                <a:latin typeface="Poppins" pitchFamily="34" charset="0"/>
+                <a:ea typeface="Poppins" pitchFamily="34" charset="-122"/>
+                <a:cs typeface="Poppins" pitchFamily="34" charset="-120"/>
+              </a:rPr>
+              <a:t>$180</a:t>
+            </a:r>
+            <a:endParaRPr lang="en-US" sz="720" dirty="0"/>
+          </a:p>
+        </p:txBody>
+      </p:sp>
+      <p:sp>
+        <p:nvSpPr>
+          <p:cNvPr id="113" name="Text 111"/>
+          <p:cNvSpPr txBox="1"/>
+          <p:nvPr/>
+        </p:nvSpPr>
+        <p:spPr>
+          <a:xfrm>
+            <a:off x="612648" y="5113325"/>
+            <a:ext cx="2743200" cy="162763"/>
           </a:xfrm>
           <a:prstGeom prst="rect">
             <a:avLst/>
@@ -4751,7 +4946,7 @@
                 <a:ea typeface="Poppins" pitchFamily="34" charset="-122"/>
                 <a:cs typeface="Poppins" pitchFamily="34" charset="-120"/>
               </a:rPr>
-              <a:t>AVC - Carson</a:t>
+              <a:t>Irymple Hotel</a:t>
             </a:r>
             <a:endParaRPr lang="en-US" sz="720" dirty="0"/>
           </a:p>
@@ -4759,14 +4954,14 @@
       </p:sp>
       <p:sp>
         <p:nvSpPr>
-          <p:cNvPr id="109" name="Text 107"/>
-          <p:cNvSpPr txBox="1"/>
-          <p:nvPr/>
-        </p:nvSpPr>
-        <p:spPr>
-          <a:xfrm>
-            <a:off x="3374136" y="4843577"/>
-            <a:ext cx="1371600" cy="154534"/>
+          <p:cNvPr id="114" name="Text 112"/>
+          <p:cNvSpPr txBox="1"/>
+          <p:nvPr/>
+        </p:nvSpPr>
+        <p:spPr>
+          <a:xfrm>
+            <a:off x="3374136" y="5113325"/>
+            <a:ext cx="1371600" cy="162763"/>
           </a:xfrm>
           <a:prstGeom prst="rect">
             <a:avLst/>
@@ -4790,7 +4985,7 @@
                 <a:ea typeface="Poppins" pitchFamily="34" charset="-122"/>
                 <a:cs typeface="Poppins" pitchFamily="34" charset="-120"/>
               </a:rPr>
-              <a:t>Jasmine Hikuroa</a:t>
+              <a:t>Phuong Ho</a:t>
             </a:r>
             <a:endParaRPr lang="en-US" sz="700" dirty="0"/>
           </a:p>
@@ -4798,14 +4993,14 @@
       </p:sp>
       <p:sp>
         <p:nvSpPr>
-          <p:cNvPr id="110" name="Text 108"/>
-          <p:cNvSpPr txBox="1"/>
-          <p:nvPr/>
-        </p:nvSpPr>
-        <p:spPr>
-          <a:xfrm>
-            <a:off x="4782312" y="4843577"/>
-            <a:ext cx="731520" cy="154534"/>
+          <p:cNvPr id="115" name="Text 113"/>
+          <p:cNvSpPr txBox="1"/>
+          <p:nvPr/>
+        </p:nvSpPr>
+        <p:spPr>
+          <a:xfrm>
+            <a:off x="4782312" y="5113325"/>
+            <a:ext cx="731520" cy="162763"/>
           </a:xfrm>
           <a:prstGeom prst="rect">
             <a:avLst/>
@@ -4829,7 +5024,7 @@
                 <a:ea typeface="Poppins" pitchFamily="34" charset="-122"/>
                 <a:cs typeface="Poppins" pitchFamily="34" charset="-120"/>
               </a:rPr>
-              <a:t>15 Oct</a:t>
+              <a:t>2 Oct</a:t>
             </a:r>
             <a:endParaRPr lang="en-US" sz="700" dirty="0"/>
           </a:p>
@@ -4837,14 +5032,14 @@
       </p:sp>
       <p:sp>
         <p:nvSpPr>
-          <p:cNvPr id="111" name="Text 109"/>
-          <p:cNvSpPr txBox="1"/>
-          <p:nvPr/>
-        </p:nvSpPr>
-        <p:spPr>
-          <a:xfrm>
-            <a:off x="5532120" y="4843577"/>
-            <a:ext cx="457200" cy="154534"/>
+          <p:cNvPr id="116" name="Text 114"/>
+          <p:cNvSpPr txBox="1"/>
+          <p:nvPr/>
+        </p:nvSpPr>
+        <p:spPr>
+          <a:xfrm>
+            <a:off x="5532120" y="5113325"/>
+            <a:ext cx="457200" cy="162763"/>
           </a:xfrm>
           <a:prstGeom prst="rect">
             <a:avLst/>
@@ -4868,7 +5063,7 @@
                 <a:ea typeface="Poppins" pitchFamily="34" charset="-122"/>
                 <a:cs typeface="Poppins" pitchFamily="34" charset="-120"/>
               </a:rPr>
-              <a:t>3</a:t>
+              <a:t>16</a:t>
             </a:r>
             <a:endParaRPr lang="en-US" sz="720" dirty="0"/>
           </a:p>
@@ -4876,14 +5071,14 @@
       </p:sp>
       <p:sp>
         <p:nvSpPr>
-          <p:cNvPr id="112" name="Text 110"/>
-          <p:cNvSpPr txBox="1"/>
-          <p:nvPr/>
-        </p:nvSpPr>
-        <p:spPr>
-          <a:xfrm>
-            <a:off x="6025896" y="4843577"/>
-            <a:ext cx="768096" cy="154534"/>
+          <p:cNvPr id="117" name="Text 115"/>
+          <p:cNvSpPr txBox="1"/>
+          <p:nvPr/>
+        </p:nvSpPr>
+        <p:spPr>
+          <a:xfrm>
+            <a:off x="6025896" y="5113325"/>
+            <a:ext cx="768096" cy="162763"/>
           </a:xfrm>
           <a:prstGeom prst="rect">
             <a:avLst/>
@@ -4907,202 +5102,7 @@
                 <a:ea typeface="Poppins" pitchFamily="34" charset="-122"/>
                 <a:cs typeface="Poppins" pitchFamily="34" charset="-120"/>
               </a:rPr>
-              <a:t>$294</a:t>
-            </a:r>
-            <a:endParaRPr lang="en-US" sz="720" dirty="0"/>
-          </a:p>
-        </p:txBody>
-      </p:sp>
-      <p:sp>
-        <p:nvSpPr>
-          <p:cNvPr id="113" name="Text 111"/>
-          <p:cNvSpPr txBox="1"/>
-          <p:nvPr/>
-        </p:nvSpPr>
-        <p:spPr>
-          <a:xfrm>
-            <a:off x="612648" y="4998110"/>
-            <a:ext cx="2743200" cy="154534"/>
-          </a:xfrm>
-          <a:prstGeom prst="rect">
-            <a:avLst/>
-          </a:prstGeom>
-          <a:noFill/>
-          <a:ln/>
-        </p:spPr>
-        <p:txBody>
-          <a:bodyPr wrap="square" lIns="0" tIns="0" rIns="0" bIns="0" rtlCol="0" anchor="ctr"/>
-          <a:lstStyle/>
-          <a:p>
-            <a:pPr indent="0" marL="0">
-              <a:buNone/>
-            </a:pPr>
-            <a:r>
-              <a:rPr lang="en-US" sz="720" dirty="0">
-                <a:solidFill>
-                  <a:srgbClr val="5E7280"/>
-                </a:solidFill>
-                <a:latin typeface="Poppins" pitchFamily="34" charset="0"/>
-                <a:ea typeface="Poppins" pitchFamily="34" charset="-122"/>
-                <a:cs typeface="Poppins" pitchFamily="34" charset="-120"/>
-              </a:rPr>
-              <a:t>Wayi Restaurant</a:t>
-            </a:r>
-            <a:endParaRPr lang="en-US" sz="720" dirty="0"/>
-          </a:p>
-        </p:txBody>
-      </p:sp>
-      <p:sp>
-        <p:nvSpPr>
-          <p:cNvPr id="114" name="Text 112"/>
-          <p:cNvSpPr txBox="1"/>
-          <p:nvPr/>
-        </p:nvSpPr>
-        <p:spPr>
-          <a:xfrm>
-            <a:off x="3374136" y="4998110"/>
-            <a:ext cx="1371600" cy="154534"/>
-          </a:xfrm>
-          <a:prstGeom prst="rect">
-            <a:avLst/>
-          </a:prstGeom>
-          <a:noFill/>
-          <a:ln/>
-        </p:spPr>
-        <p:txBody>
-          <a:bodyPr wrap="square" lIns="0" tIns="0" rIns="0" bIns="0" rtlCol="0" anchor="ctr"/>
-          <a:lstStyle/>
-          <a:p>
-            <a:pPr indent="0" marL="0">
-              <a:buNone/>
-            </a:pPr>
-            <a:r>
-              <a:rPr lang="en-US" sz="700" dirty="0">
-                <a:solidFill>
-                  <a:srgbClr val="5E7280"/>
-                </a:solidFill>
-                <a:latin typeface="Poppins" pitchFamily="34" charset="0"/>
-                <a:ea typeface="Poppins" pitchFamily="34" charset="-122"/>
-                <a:cs typeface="Poppins" pitchFamily="34" charset="-120"/>
-              </a:rPr>
-              <a:t>Jasmine Hikuroa</a:t>
-            </a:r>
-            <a:endParaRPr lang="en-US" sz="700" dirty="0"/>
-          </a:p>
-        </p:txBody>
-      </p:sp>
-      <p:sp>
-        <p:nvSpPr>
-          <p:cNvPr id="115" name="Text 113"/>
-          <p:cNvSpPr txBox="1"/>
-          <p:nvPr/>
-        </p:nvSpPr>
-        <p:spPr>
-          <a:xfrm>
-            <a:off x="4782312" y="4998110"/>
-            <a:ext cx="731520" cy="154534"/>
-          </a:xfrm>
-          <a:prstGeom prst="rect">
-            <a:avLst/>
-          </a:prstGeom>
-          <a:noFill/>
-          <a:ln/>
-        </p:spPr>
-        <p:txBody>
-          <a:bodyPr wrap="square" lIns="0" tIns="0" rIns="0" bIns="0" rtlCol="0" anchor="ctr"/>
-          <a:lstStyle/>
-          <a:p>
-            <a:pPr indent="0" marL="0">
-              <a:buNone/>
-            </a:pPr>
-            <a:r>
-              <a:rPr lang="en-US" sz="700" dirty="0">
-                <a:solidFill>
-                  <a:srgbClr val="8FA1AC"/>
-                </a:solidFill>
-                <a:latin typeface="Poppins" pitchFamily="34" charset="0"/>
-                <a:ea typeface="Poppins" pitchFamily="34" charset="-122"/>
-                <a:cs typeface="Poppins" pitchFamily="34" charset="-120"/>
-              </a:rPr>
-              <a:t>17 Sep</a:t>
-            </a:r>
-            <a:endParaRPr lang="en-US" sz="700" dirty="0"/>
-          </a:p>
-        </p:txBody>
-      </p:sp>
-      <p:sp>
-        <p:nvSpPr>
-          <p:cNvPr id="116" name="Text 114"/>
-          <p:cNvSpPr txBox="1"/>
-          <p:nvPr/>
-        </p:nvSpPr>
-        <p:spPr>
-          <a:xfrm>
-            <a:off x="5532120" y="4998110"/>
-            <a:ext cx="457200" cy="154534"/>
-          </a:xfrm>
-          <a:prstGeom prst="rect">
-            <a:avLst/>
-          </a:prstGeom>
-          <a:noFill/>
-          <a:ln/>
-        </p:spPr>
-        <p:txBody>
-          <a:bodyPr wrap="square" lIns="0" tIns="0" rIns="0" bIns="0" rtlCol="0" anchor="ctr"/>
-          <a:lstStyle/>
-          <a:p>
-            <a:pPr algn="r" indent="0" marL="0">
-              <a:buNone/>
-            </a:pPr>
-            <a:r>
-              <a:rPr lang="en-US" sz="720" b="1" dirty="0">
-                <a:solidFill>
-                  <a:srgbClr val="5E7280"/>
-                </a:solidFill>
-                <a:latin typeface="Poppins" pitchFamily="34" charset="0"/>
-                <a:ea typeface="Poppins" pitchFamily="34" charset="-122"/>
-                <a:cs typeface="Poppins" pitchFamily="34" charset="-120"/>
-              </a:rPr>
-              <a:t>31</a:t>
-            </a:r>
-            <a:endParaRPr lang="en-US" sz="720" dirty="0"/>
-          </a:p>
-        </p:txBody>
-      </p:sp>
-      <p:sp>
-        <p:nvSpPr>
-          <p:cNvPr id="117" name="Text 115"/>
-          <p:cNvSpPr txBox="1"/>
-          <p:nvPr/>
-        </p:nvSpPr>
-        <p:spPr>
-          <a:xfrm>
-            <a:off x="6025896" y="4998110"/>
-            <a:ext cx="768096" cy="154534"/>
-          </a:xfrm>
-          <a:prstGeom prst="rect">
-            <a:avLst/>
-          </a:prstGeom>
-          <a:noFill/>
-          <a:ln/>
-        </p:spPr>
-        <p:txBody>
-          <a:bodyPr wrap="square" lIns="0" tIns="0" rIns="0" bIns="0" rtlCol="0" anchor="ctr"/>
-          <a:lstStyle/>
-          <a:p>
-            <a:pPr algn="r" indent="0" marL="0">
-              <a:buNone/>
-            </a:pPr>
-            <a:r>
-              <a:rPr lang="en-US" sz="720" b="1" dirty="0">
-                <a:solidFill>
-                  <a:srgbClr val="12293A"/>
-                </a:solidFill>
-                <a:latin typeface="Poppins" pitchFamily="34" charset="0"/>
-                <a:ea typeface="Poppins" pitchFamily="34" charset="-122"/>
-                <a:cs typeface="Poppins" pitchFamily="34" charset="-120"/>
-              </a:rPr>
-              <a:t>$250</a:t>
+              <a:t>$147</a:t>
             </a:r>
             <a:endParaRPr lang="en-US" sz="720" dirty="0"/>
           </a:p>
@@ -5116,8 +5116,8 @@
         </p:nvSpPr>
         <p:spPr>
           <a:xfrm>
-            <a:off x="539496" y="5152644"/>
-            <a:ext cx="6419088" cy="154534"/>
+            <a:off x="539496" y="5276088"/>
+            <a:ext cx="6419088" cy="162763"/>
           </a:xfrm>
           <a:prstGeom prst="rect">
             <a:avLst/>
@@ -5136,8 +5136,8 @@
         </p:nvSpPr>
         <p:spPr>
           <a:xfrm>
-            <a:off x="612648" y="5152644"/>
-            <a:ext cx="2743200" cy="154534"/>
+            <a:off x="612648" y="5276088"/>
+            <a:ext cx="2743200" cy="162763"/>
           </a:xfrm>
           <a:prstGeom prst="rect">
             <a:avLst/>
@@ -5161,7 +5161,7 @@
                 <a:ea typeface="Poppins" pitchFamily="34" charset="-122"/>
                 <a:cs typeface="Poppins" pitchFamily="34" charset="-120"/>
               </a:rPr>
-              <a:t>Kirra Beach House</a:t>
+              <a:t>Little Ship Club</a:t>
             </a:r>
             <a:endParaRPr lang="en-US" sz="720" dirty="0"/>
           </a:p>
@@ -5175,8 +5175,8 @@
         </p:nvSpPr>
         <p:spPr>
           <a:xfrm>
-            <a:off x="3374136" y="5152644"/>
-            <a:ext cx="1371600" cy="154534"/>
+            <a:off x="3374136" y="5276088"/>
+            <a:ext cx="1371600" cy="162763"/>
           </a:xfrm>
           <a:prstGeom prst="rect">
             <a:avLst/>
@@ -5214,8 +5214,8 @@
         </p:nvSpPr>
         <p:spPr>
           <a:xfrm>
-            <a:off x="4782312" y="5152644"/>
-            <a:ext cx="731520" cy="154534"/>
+            <a:off x="4782312" y="5276088"/>
+            <a:ext cx="731520" cy="162763"/>
           </a:xfrm>
           <a:prstGeom prst="rect">
             <a:avLst/>
@@ -5239,7 +5239,7 @@
                 <a:ea typeface="Poppins" pitchFamily="34" charset="-122"/>
                 <a:cs typeface="Poppins" pitchFamily="34" charset="-120"/>
               </a:rPr>
-              <a:t>8 Jun</a:t>
+              <a:t>26 May</a:t>
             </a:r>
             <a:endParaRPr lang="en-US" sz="700" dirty="0"/>
           </a:p>
@@ -5253,8 +5253,8 @@
         </p:nvSpPr>
         <p:spPr>
           <a:xfrm>
-            <a:off x="5532120" y="5152644"/>
-            <a:ext cx="457200" cy="154534"/>
+            <a:off x="5532120" y="5276088"/>
+            <a:ext cx="457200" cy="162763"/>
           </a:xfrm>
           <a:prstGeom prst="rect">
             <a:avLst/>
@@ -5278,7 +5278,7 @@
                 <a:ea typeface="Poppins" pitchFamily="34" charset="-122"/>
                 <a:cs typeface="Poppins" pitchFamily="34" charset="-120"/>
               </a:rPr>
-              <a:t>132</a:t>
+              <a:t>145</a:t>
             </a:r>
             <a:endParaRPr lang="en-US" sz="720" dirty="0"/>
           </a:p>
@@ -5292,8 +5292,8 @@
         </p:nvSpPr>
         <p:spPr>
           <a:xfrm>
-            <a:off x="6025896" y="5152644"/>
-            <a:ext cx="768096" cy="154534"/>
+            <a:off x="6025896" y="5276088"/>
+            <a:ext cx="768096" cy="162763"/>
           </a:xfrm>
           <a:prstGeom prst="rect">
             <a:avLst/>
@@ -5317,7 +5317,7 @@
                 <a:ea typeface="Poppins" pitchFamily="34" charset="-122"/>
                 <a:cs typeface="Poppins" pitchFamily="34" charset="-120"/>
               </a:rPr>
-              <a:t>$180</a:t>
+              <a:t>$116</a:t>
             </a:r>
             <a:endParaRPr lang="en-US" sz="720" dirty="0"/>
           </a:p>
@@ -5331,8 +5331,8 @@
         </p:nvSpPr>
         <p:spPr>
           <a:xfrm>
-            <a:off x="612648" y="5307178"/>
-            <a:ext cx="2743200" cy="154534"/>
+            <a:off x="612648" y="5438851"/>
+            <a:ext cx="2743200" cy="162763"/>
           </a:xfrm>
           <a:prstGeom prst="rect">
             <a:avLst/>
@@ -5356,7 +5356,7 @@
                 <a:ea typeface="Poppins" pitchFamily="34" charset="-122"/>
                 <a:cs typeface="Poppins" pitchFamily="34" charset="-120"/>
               </a:rPr>
-              <a:t>Irymple Hotel</a:t>
+              <a:t>Crossing Inn - Leedal</a:t>
             </a:r>
             <a:endParaRPr lang="en-US" sz="720" dirty="0"/>
           </a:p>
@@ -5370,8 +5370,8 @@
         </p:nvSpPr>
         <p:spPr>
           <a:xfrm>
-            <a:off x="3374136" y="5307178"/>
-            <a:ext cx="1371600" cy="154534"/>
+            <a:off x="3374136" y="5438851"/>
+            <a:ext cx="1371600" cy="162763"/>
           </a:xfrm>
           <a:prstGeom prst="rect">
             <a:avLst/>
@@ -5395,7 +5395,7 @@
                 <a:ea typeface="Poppins" pitchFamily="34" charset="-122"/>
                 <a:cs typeface="Poppins" pitchFamily="34" charset="-120"/>
               </a:rPr>
-              <a:t>Phuong Ho</a:t>
+              <a:t>Bjorn Magabo</a:t>
             </a:r>
             <a:endParaRPr lang="en-US" sz="700" dirty="0"/>
           </a:p>
@@ -5409,8 +5409,8 @@
         </p:nvSpPr>
         <p:spPr>
           <a:xfrm>
-            <a:off x="4782312" y="5307178"/>
-            <a:ext cx="731520" cy="154534"/>
+            <a:off x="4782312" y="5438851"/>
+            <a:ext cx="731520" cy="162763"/>
           </a:xfrm>
           <a:prstGeom prst="rect">
             <a:avLst/>
@@ -5434,7 +5434,7 @@
                 <a:ea typeface="Poppins" pitchFamily="34" charset="-122"/>
                 <a:cs typeface="Poppins" pitchFamily="34" charset="-120"/>
               </a:rPr>
-              <a:t>2 Oct</a:t>
+              <a:t>1 Oct</a:t>
             </a:r>
             <a:endParaRPr lang="en-US" sz="700" dirty="0"/>
           </a:p>
@@ -5448,8 +5448,8 @@
         </p:nvSpPr>
         <p:spPr>
           <a:xfrm>
-            <a:off x="5532120" y="5307178"/>
-            <a:ext cx="457200" cy="154534"/>
+            <a:off x="5532120" y="5438851"/>
+            <a:ext cx="457200" cy="162763"/>
           </a:xfrm>
           <a:prstGeom prst="rect">
             <a:avLst/>
@@ -5473,7 +5473,7 @@
                 <a:ea typeface="Poppins" pitchFamily="34" charset="-122"/>
                 <a:cs typeface="Poppins" pitchFamily="34" charset="-120"/>
               </a:rPr>
-              <a:t>16</a:t>
+              <a:t>17</a:t>
             </a:r>
             <a:endParaRPr lang="en-US" sz="720" dirty="0"/>
           </a:p>
@@ -5487,8 +5487,8 @@
         </p:nvSpPr>
         <p:spPr>
           <a:xfrm>
-            <a:off x="6025896" y="5307178"/>
-            <a:ext cx="768096" cy="154534"/>
+            <a:off x="6025896" y="5438851"/>
+            <a:ext cx="768096" cy="162763"/>
           </a:xfrm>
           <a:prstGeom prst="rect">
             <a:avLst/>
@@ -5512,7 +5512,7 @@
                 <a:ea typeface="Poppins" pitchFamily="34" charset="-122"/>
                 <a:cs typeface="Poppins" pitchFamily="34" charset="-120"/>
               </a:rPr>
-              <a:t>$147</a:t>
+              <a:t>$106</a:t>
             </a:r>
             <a:endParaRPr lang="en-US" sz="720" dirty="0"/>
           </a:p>
@@ -5526,8 +5526,8 @@
         </p:nvSpPr>
         <p:spPr>
           <a:xfrm>
-            <a:off x="539496" y="5461711"/>
-            <a:ext cx="6419088" cy="154534"/>
+            <a:off x="539496" y="5601614"/>
+            <a:ext cx="6419088" cy="162763"/>
           </a:xfrm>
           <a:prstGeom prst="rect">
             <a:avLst/>
@@ -5546,32 +5546,188 @@
         </p:nvSpPr>
         <p:spPr>
           <a:xfrm>
-            <a:off x="612648" y="5461711"/>
-            <a:ext cx="2743200" cy="154534"/>
-          </a:xfrm>
-          <a:prstGeom prst="rect">
-            <a:avLst/>
-          </a:prstGeom>
-          <a:noFill/>
-          <a:ln/>
-        </p:spPr>
-        <p:txBody>
-          <a:bodyPr wrap="square" lIns="0" tIns="0" rIns="0" bIns="0" rtlCol="0" anchor="ctr"/>
-          <a:lstStyle/>
-          <a:p>
-            <a:pPr indent="0" marL="0">
+            <a:off x="612648" y="5601614"/>
+            <a:ext cx="2743200" cy="162763"/>
+          </a:xfrm>
+          <a:prstGeom prst="rect">
+            <a:avLst/>
+          </a:prstGeom>
+          <a:noFill/>
+          <a:ln/>
+        </p:spPr>
+        <p:txBody>
+          <a:bodyPr wrap="square" lIns="0" tIns="0" rIns="0" bIns="0" rtlCol="0" anchor="ctr"/>
+          <a:lstStyle/>
+          <a:p>
+            <a:pPr indent="0" marL="0">
+              <a:buNone/>
+            </a:pPr>
+            <a:r>
+              <a:rPr lang="en-US" sz="720" dirty="0">
+                <a:solidFill>
+                  <a:srgbClr val="5E7280"/>
+                </a:solidFill>
+                <a:latin typeface="Poppins" pitchFamily="34" charset="0"/>
+                <a:ea typeface="Poppins" pitchFamily="34" charset="-122"/>
+                <a:cs typeface="Poppins" pitchFamily="34" charset="-120"/>
+              </a:rPr>
+              <a:t>Jabiru Golf Club</a:t>
+            </a:r>
+            <a:endParaRPr lang="en-US" sz="720" dirty="0"/>
+          </a:p>
+        </p:txBody>
+      </p:sp>
+      <p:sp>
+        <p:nvSpPr>
+          <p:cNvPr id="131" name="Text 129"/>
+          <p:cNvSpPr txBox="1"/>
+          <p:nvPr/>
+        </p:nvSpPr>
+        <p:spPr>
+          <a:xfrm>
+            <a:off x="3374136" y="5601614"/>
+            <a:ext cx="1371600" cy="162763"/>
+          </a:xfrm>
+          <a:prstGeom prst="rect">
+            <a:avLst/>
+          </a:prstGeom>
+          <a:noFill/>
+          <a:ln/>
+        </p:spPr>
+        <p:txBody>
+          <a:bodyPr wrap="square" lIns="0" tIns="0" rIns="0" bIns="0" rtlCol="0" anchor="ctr"/>
+          <a:lstStyle/>
+          <a:p>
+            <a:pPr indent="0" marL="0">
+              <a:buNone/>
+            </a:pPr>
+            <a:r>
+              <a:rPr lang="en-US" sz="700" dirty="0">
+                <a:solidFill>
+                  <a:srgbClr val="5E7280"/>
+                </a:solidFill>
+                <a:latin typeface="Poppins" pitchFamily="34" charset="0"/>
+                <a:ea typeface="Poppins" pitchFamily="34" charset="-122"/>
+                <a:cs typeface="Poppins" pitchFamily="34" charset="-120"/>
+              </a:rPr>
+              <a:t>Bjorn Magabo</a:t>
+            </a:r>
+            <a:endParaRPr lang="en-US" sz="700" dirty="0"/>
+          </a:p>
+        </p:txBody>
+      </p:sp>
+      <p:sp>
+        <p:nvSpPr>
+          <p:cNvPr id="132" name="Text 130"/>
+          <p:cNvSpPr txBox="1"/>
+          <p:nvPr/>
+        </p:nvSpPr>
+        <p:spPr>
+          <a:xfrm>
+            <a:off x="4782312" y="5601614"/>
+            <a:ext cx="731520" cy="162763"/>
+          </a:xfrm>
+          <a:prstGeom prst="rect">
+            <a:avLst/>
+          </a:prstGeom>
+          <a:noFill/>
+          <a:ln/>
+        </p:spPr>
+        <p:txBody>
+          <a:bodyPr wrap="square" lIns="0" tIns="0" rIns="0" bIns="0" rtlCol="0" anchor="ctr"/>
+          <a:lstStyle/>
+          <a:p>
+            <a:pPr indent="0" marL="0">
+              <a:buNone/>
+            </a:pPr>
+            <a:r>
+              <a:rPr lang="en-US" sz="700" dirty="0">
+                <a:solidFill>
+                  <a:srgbClr val="8FA1AC"/>
+                </a:solidFill>
+                <a:latin typeface="Poppins" pitchFamily="34" charset="0"/>
+                <a:ea typeface="Poppins" pitchFamily="34" charset="-122"/>
+                <a:cs typeface="Poppins" pitchFamily="34" charset="-120"/>
+              </a:rPr>
+              <a:t>18 Sep</a:t>
+            </a:r>
+            <a:endParaRPr lang="en-US" sz="700" dirty="0"/>
+          </a:p>
+        </p:txBody>
+      </p:sp>
+      <p:sp>
+        <p:nvSpPr>
+          <p:cNvPr id="133" name="Text 131"/>
+          <p:cNvSpPr txBox="1"/>
+          <p:nvPr/>
+        </p:nvSpPr>
+        <p:spPr>
+          <a:xfrm>
+            <a:off x="5532120" y="5601614"/>
+            <a:ext cx="457200" cy="162763"/>
+          </a:xfrm>
+          <a:prstGeom prst="rect">
+            <a:avLst/>
+          </a:prstGeom>
+          <a:noFill/>
+          <a:ln/>
+        </p:spPr>
+        <p:txBody>
+          <a:bodyPr wrap="square" lIns="0" tIns="0" rIns="0" bIns="0" rtlCol="0" anchor="ctr"/>
+          <a:lstStyle/>
+          <a:p>
+            <a:pPr algn="r" indent="0" marL="0">
               <a:buNone/>
             </a:pPr>
             <a:r>
               <a:rPr lang="en-US" sz="720" b="1" dirty="0">
                 <a:solidFill>
+                  <a:srgbClr val="5E7280"/>
+                </a:solidFill>
+                <a:latin typeface="Poppins" pitchFamily="34" charset="0"/>
+                <a:ea typeface="Poppins" pitchFamily="34" charset="-122"/>
+                <a:cs typeface="Poppins" pitchFamily="34" charset="-120"/>
+              </a:rPr>
+              <a:t>30</a:t>
+            </a:r>
+            <a:endParaRPr lang="en-US" sz="720" dirty="0"/>
+          </a:p>
+        </p:txBody>
+      </p:sp>
+      <p:sp>
+        <p:nvSpPr>
+          <p:cNvPr id="134" name="Text 132"/>
+          <p:cNvSpPr txBox="1"/>
+          <p:nvPr/>
+        </p:nvSpPr>
+        <p:spPr>
+          <a:xfrm>
+            <a:off x="6025896" y="5601614"/>
+            <a:ext cx="768096" cy="162763"/>
+          </a:xfrm>
+          <a:prstGeom prst="rect">
+            <a:avLst/>
+          </a:prstGeom>
+          <a:noFill/>
+          <a:ln/>
+        </p:spPr>
+        <p:txBody>
+          <a:bodyPr wrap="square" lIns="0" tIns="0" rIns="0" bIns="0" rtlCol="0" anchor="ctr"/>
+          <a:lstStyle/>
+          <a:p>
+            <a:pPr algn="r" indent="0" marL="0">
+              <a:buNone/>
+            </a:pPr>
+            <a:r>
+              <a:rPr lang="en-US" sz="720" b="1" dirty="0">
+                <a:solidFill>
                   <a:srgbClr val="12293A"/>
                 </a:solidFill>
                 <a:latin typeface="Poppins" pitchFamily="34" charset="0"/>
                 <a:ea typeface="Poppins" pitchFamily="34" charset="-122"/>
                 <a:cs typeface="Poppins" pitchFamily="34" charset="-120"/>
               </a:rPr>
-              <a:t>Little Ship Club</a:t>
+              <a:t>$106</a:t>
             </a:r>
             <a:endParaRPr lang="en-US" sz="720" dirty="0"/>
           </a:p>
@@ -5579,579 +5735,13 @@
       </p:sp>
       <p:sp>
         <p:nvSpPr>
-          <p:cNvPr id="131" name="Text 129"/>
-          <p:cNvSpPr txBox="1"/>
-          <p:nvPr/>
-        </p:nvSpPr>
-        <p:spPr>
-          <a:xfrm>
-            <a:off x="3374136" y="5461711"/>
-            <a:ext cx="1371600" cy="154534"/>
-          </a:xfrm>
-          <a:prstGeom prst="rect">
-            <a:avLst/>
-          </a:prstGeom>
-          <a:noFill/>
-          <a:ln/>
-        </p:spPr>
-        <p:txBody>
-          <a:bodyPr wrap="square" lIns="0" tIns="0" rIns="0" bIns="0" rtlCol="0" anchor="ctr"/>
-          <a:lstStyle/>
-          <a:p>
-            <a:pPr indent="0" marL="0">
-              <a:buNone/>
-            </a:pPr>
-            <a:r>
-              <a:rPr lang="en-US" sz="700" dirty="0">
-                <a:solidFill>
-                  <a:srgbClr val="5E7280"/>
-                </a:solidFill>
-                <a:latin typeface="Poppins" pitchFamily="34" charset="0"/>
-                <a:ea typeface="Poppins" pitchFamily="34" charset="-122"/>
-                <a:cs typeface="Poppins" pitchFamily="34" charset="-120"/>
-              </a:rPr>
-              <a:t>Brett Gorman</a:t>
-            </a:r>
-            <a:endParaRPr lang="en-US" sz="700" dirty="0"/>
-          </a:p>
-        </p:txBody>
-      </p:sp>
-      <p:sp>
-        <p:nvSpPr>
-          <p:cNvPr id="132" name="Text 130"/>
-          <p:cNvSpPr txBox="1"/>
-          <p:nvPr/>
-        </p:nvSpPr>
-        <p:spPr>
-          <a:xfrm>
-            <a:off x="4782312" y="5461711"/>
-            <a:ext cx="731520" cy="154534"/>
-          </a:xfrm>
-          <a:prstGeom prst="rect">
-            <a:avLst/>
-          </a:prstGeom>
-          <a:noFill/>
-          <a:ln/>
-        </p:spPr>
-        <p:txBody>
-          <a:bodyPr wrap="square" lIns="0" tIns="0" rIns="0" bIns="0" rtlCol="0" anchor="ctr"/>
-          <a:lstStyle/>
-          <a:p>
-            <a:pPr indent="0" marL="0">
-              <a:buNone/>
-            </a:pPr>
-            <a:r>
-              <a:rPr lang="en-US" sz="700" dirty="0">
-                <a:solidFill>
-                  <a:srgbClr val="8FA1AC"/>
-                </a:solidFill>
-                <a:latin typeface="Poppins" pitchFamily="34" charset="0"/>
-                <a:ea typeface="Poppins" pitchFamily="34" charset="-122"/>
-                <a:cs typeface="Poppins" pitchFamily="34" charset="-120"/>
-              </a:rPr>
-              <a:t>26 May</a:t>
-            </a:r>
-            <a:endParaRPr lang="en-US" sz="700" dirty="0"/>
-          </a:p>
-        </p:txBody>
-      </p:sp>
-      <p:sp>
-        <p:nvSpPr>
-          <p:cNvPr id="133" name="Text 131"/>
-          <p:cNvSpPr txBox="1"/>
-          <p:nvPr/>
-        </p:nvSpPr>
-        <p:spPr>
-          <a:xfrm>
-            <a:off x="5532120" y="5461711"/>
-            <a:ext cx="457200" cy="154534"/>
-          </a:xfrm>
-          <a:prstGeom prst="rect">
-            <a:avLst/>
-          </a:prstGeom>
-          <a:noFill/>
-          <a:ln/>
-        </p:spPr>
-        <p:txBody>
-          <a:bodyPr wrap="square" lIns="0" tIns="0" rIns="0" bIns="0" rtlCol="0" anchor="ctr"/>
-          <a:lstStyle/>
-          <a:p>
-            <a:pPr algn="r" indent="0" marL="0">
-              <a:buNone/>
-            </a:pPr>
-            <a:r>
-              <a:rPr lang="en-US" sz="720" b="1" dirty="0">
-                <a:solidFill>
-                  <a:srgbClr val="C88A2E"/>
-                </a:solidFill>
-                <a:latin typeface="Poppins" pitchFamily="34" charset="0"/>
-                <a:ea typeface="Poppins" pitchFamily="34" charset="-122"/>
-                <a:cs typeface="Poppins" pitchFamily="34" charset="-120"/>
-              </a:rPr>
-              <a:t>145</a:t>
-            </a:r>
-            <a:endParaRPr lang="en-US" sz="720" dirty="0"/>
-          </a:p>
-        </p:txBody>
-      </p:sp>
-      <p:sp>
-        <p:nvSpPr>
-          <p:cNvPr id="134" name="Text 132"/>
-          <p:cNvSpPr txBox="1"/>
-          <p:nvPr/>
-        </p:nvSpPr>
-        <p:spPr>
-          <a:xfrm>
-            <a:off x="6025896" y="5461711"/>
-            <a:ext cx="768096" cy="154534"/>
-          </a:xfrm>
-          <a:prstGeom prst="rect">
-            <a:avLst/>
-          </a:prstGeom>
-          <a:noFill/>
-          <a:ln/>
-        </p:spPr>
-        <p:txBody>
-          <a:bodyPr wrap="square" lIns="0" tIns="0" rIns="0" bIns="0" rtlCol="0" anchor="ctr"/>
-          <a:lstStyle/>
-          <a:p>
-            <a:pPr algn="r" indent="0" marL="0">
-              <a:buNone/>
-            </a:pPr>
-            <a:r>
-              <a:rPr lang="en-US" sz="720" b="1" dirty="0">
-                <a:solidFill>
-                  <a:srgbClr val="12293A"/>
-                </a:solidFill>
-                <a:latin typeface="Poppins" pitchFamily="34" charset="0"/>
-                <a:ea typeface="Poppins" pitchFamily="34" charset="-122"/>
-                <a:cs typeface="Poppins" pitchFamily="34" charset="-120"/>
-              </a:rPr>
-              <a:t>$116</a:t>
-            </a:r>
-            <a:endParaRPr lang="en-US" sz="720" dirty="0"/>
-          </a:p>
-        </p:txBody>
-      </p:sp>
-      <p:sp>
-        <p:nvSpPr>
-          <p:cNvPr id="135" name="Text 133"/>
-          <p:cNvSpPr txBox="1"/>
-          <p:nvPr/>
-        </p:nvSpPr>
-        <p:spPr>
-          <a:xfrm>
-            <a:off x="612648" y="5616245"/>
-            <a:ext cx="2743200" cy="154534"/>
-          </a:xfrm>
-          <a:prstGeom prst="rect">
-            <a:avLst/>
-          </a:prstGeom>
-          <a:noFill/>
-          <a:ln/>
-        </p:spPr>
-        <p:txBody>
-          <a:bodyPr wrap="square" lIns="0" tIns="0" rIns="0" bIns="0" rtlCol="0" anchor="ctr"/>
-          <a:lstStyle/>
-          <a:p>
-            <a:pPr indent="0" marL="0">
-              <a:buNone/>
-            </a:pPr>
-            <a:r>
-              <a:rPr lang="en-US" sz="720" dirty="0">
-                <a:solidFill>
-                  <a:srgbClr val="5E7280"/>
-                </a:solidFill>
-                <a:latin typeface="Poppins" pitchFamily="34" charset="0"/>
-                <a:ea typeface="Poppins" pitchFamily="34" charset="-122"/>
-                <a:cs typeface="Poppins" pitchFamily="34" charset="-120"/>
-              </a:rPr>
-              <a:t>Crossing Inn - Leedal</a:t>
-            </a:r>
-            <a:endParaRPr lang="en-US" sz="720" dirty="0"/>
-          </a:p>
-        </p:txBody>
-      </p:sp>
-      <p:sp>
-        <p:nvSpPr>
-          <p:cNvPr id="136" name="Text 134"/>
-          <p:cNvSpPr txBox="1"/>
-          <p:nvPr/>
-        </p:nvSpPr>
-        <p:spPr>
-          <a:xfrm>
-            <a:off x="3374136" y="5616245"/>
-            <a:ext cx="1371600" cy="154534"/>
-          </a:xfrm>
-          <a:prstGeom prst="rect">
-            <a:avLst/>
-          </a:prstGeom>
-          <a:noFill/>
-          <a:ln/>
-        </p:spPr>
-        <p:txBody>
-          <a:bodyPr wrap="square" lIns="0" tIns="0" rIns="0" bIns="0" rtlCol="0" anchor="ctr"/>
-          <a:lstStyle/>
-          <a:p>
-            <a:pPr indent="0" marL="0">
-              <a:buNone/>
-            </a:pPr>
-            <a:r>
-              <a:rPr lang="en-US" sz="700" dirty="0">
-                <a:solidFill>
-                  <a:srgbClr val="5E7280"/>
-                </a:solidFill>
-                <a:latin typeface="Poppins" pitchFamily="34" charset="0"/>
-                <a:ea typeface="Poppins" pitchFamily="34" charset="-122"/>
-                <a:cs typeface="Poppins" pitchFamily="34" charset="-120"/>
-              </a:rPr>
-              <a:t>Bjorn Magabo</a:t>
-            </a:r>
-            <a:endParaRPr lang="en-US" sz="700" dirty="0"/>
-          </a:p>
-        </p:txBody>
-      </p:sp>
-      <p:sp>
-        <p:nvSpPr>
-          <p:cNvPr id="137" name="Text 135"/>
-          <p:cNvSpPr txBox="1"/>
-          <p:nvPr/>
-        </p:nvSpPr>
-        <p:spPr>
-          <a:xfrm>
-            <a:off x="4782312" y="5616245"/>
-            <a:ext cx="731520" cy="154534"/>
-          </a:xfrm>
-          <a:prstGeom prst="rect">
-            <a:avLst/>
-          </a:prstGeom>
-          <a:noFill/>
-          <a:ln/>
-        </p:spPr>
-        <p:txBody>
-          <a:bodyPr wrap="square" lIns="0" tIns="0" rIns="0" bIns="0" rtlCol="0" anchor="ctr"/>
-          <a:lstStyle/>
-          <a:p>
-            <a:pPr indent="0" marL="0">
-              <a:buNone/>
-            </a:pPr>
-            <a:r>
-              <a:rPr lang="en-US" sz="700" dirty="0">
-                <a:solidFill>
-                  <a:srgbClr val="8FA1AC"/>
-                </a:solidFill>
-                <a:latin typeface="Poppins" pitchFamily="34" charset="0"/>
-                <a:ea typeface="Poppins" pitchFamily="34" charset="-122"/>
-                <a:cs typeface="Poppins" pitchFamily="34" charset="-120"/>
-              </a:rPr>
-              <a:t>1 Oct</a:t>
-            </a:r>
-            <a:endParaRPr lang="en-US" sz="700" dirty="0"/>
-          </a:p>
-        </p:txBody>
-      </p:sp>
-      <p:sp>
-        <p:nvSpPr>
-          <p:cNvPr id="138" name="Text 136"/>
-          <p:cNvSpPr txBox="1"/>
-          <p:nvPr/>
-        </p:nvSpPr>
-        <p:spPr>
-          <a:xfrm>
-            <a:off x="5532120" y="5616245"/>
-            <a:ext cx="457200" cy="154534"/>
-          </a:xfrm>
-          <a:prstGeom prst="rect">
-            <a:avLst/>
-          </a:prstGeom>
-          <a:noFill/>
-          <a:ln/>
-        </p:spPr>
-        <p:txBody>
-          <a:bodyPr wrap="square" lIns="0" tIns="0" rIns="0" bIns="0" rtlCol="0" anchor="ctr"/>
-          <a:lstStyle/>
-          <a:p>
-            <a:pPr algn="r" indent="0" marL="0">
-              <a:buNone/>
-            </a:pPr>
-            <a:r>
-              <a:rPr lang="en-US" sz="720" b="1" dirty="0">
-                <a:solidFill>
-                  <a:srgbClr val="5E7280"/>
-                </a:solidFill>
-                <a:latin typeface="Poppins" pitchFamily="34" charset="0"/>
-                <a:ea typeface="Poppins" pitchFamily="34" charset="-122"/>
-                <a:cs typeface="Poppins" pitchFamily="34" charset="-120"/>
-              </a:rPr>
-              <a:t>17</a:t>
-            </a:r>
-            <a:endParaRPr lang="en-US" sz="720" dirty="0"/>
-          </a:p>
-        </p:txBody>
-      </p:sp>
-      <p:sp>
-        <p:nvSpPr>
-          <p:cNvPr id="139" name="Text 137"/>
-          <p:cNvSpPr txBox="1"/>
-          <p:nvPr/>
-        </p:nvSpPr>
-        <p:spPr>
-          <a:xfrm>
-            <a:off x="6025896" y="5616245"/>
-            <a:ext cx="768096" cy="154534"/>
-          </a:xfrm>
-          <a:prstGeom prst="rect">
-            <a:avLst/>
-          </a:prstGeom>
-          <a:noFill/>
-          <a:ln/>
-        </p:spPr>
-        <p:txBody>
-          <a:bodyPr wrap="square" lIns="0" tIns="0" rIns="0" bIns="0" rtlCol="0" anchor="ctr"/>
-          <a:lstStyle/>
-          <a:p>
-            <a:pPr algn="r" indent="0" marL="0">
-              <a:buNone/>
-            </a:pPr>
-            <a:r>
-              <a:rPr lang="en-US" sz="720" b="1" dirty="0">
-                <a:solidFill>
-                  <a:srgbClr val="12293A"/>
-                </a:solidFill>
-                <a:latin typeface="Poppins" pitchFamily="34" charset="0"/>
-                <a:ea typeface="Poppins" pitchFamily="34" charset="-122"/>
-                <a:cs typeface="Poppins" pitchFamily="34" charset="-120"/>
-              </a:rPr>
-              <a:t>$106</a:t>
-            </a:r>
-            <a:endParaRPr lang="en-US" sz="720" dirty="0"/>
-          </a:p>
-        </p:txBody>
-      </p:sp>
-      <p:sp>
-        <p:nvSpPr>
-          <p:cNvPr id="140" name="Shape 138"/>
+          <p:cNvPr id="135" name="Shape 133"/>
           <p:cNvSpPr/>
           <p:nvPr/>
         </p:nvSpPr>
         <p:spPr>
           <a:xfrm>
-            <a:off x="539496" y="5770778"/>
-            <a:ext cx="6419088" cy="154534"/>
-          </a:xfrm>
-          <a:prstGeom prst="rect">
-            <a:avLst/>
-          </a:prstGeom>
-          <a:solidFill>
-            <a:srgbClr val="F2F6F8"/>
-          </a:solidFill>
-          <a:ln/>
-        </p:spPr>
-      </p:sp>
-      <p:sp>
-        <p:nvSpPr>
-          <p:cNvPr id="141" name="Text 139"/>
-          <p:cNvSpPr txBox="1"/>
-          <p:nvPr/>
-        </p:nvSpPr>
-        <p:spPr>
-          <a:xfrm>
-            <a:off x="612648" y="5770778"/>
-            <a:ext cx="2743200" cy="154534"/>
-          </a:xfrm>
-          <a:prstGeom prst="rect">
-            <a:avLst/>
-          </a:prstGeom>
-          <a:noFill/>
-          <a:ln/>
-        </p:spPr>
-        <p:txBody>
-          <a:bodyPr wrap="square" lIns="0" tIns="0" rIns="0" bIns="0" rtlCol="0" anchor="ctr"/>
-          <a:lstStyle/>
-          <a:p>
-            <a:pPr indent="0" marL="0">
-              <a:buNone/>
-            </a:pPr>
-            <a:r>
-              <a:rPr lang="en-US" sz="720" dirty="0">
-                <a:solidFill>
-                  <a:srgbClr val="5E7280"/>
-                </a:solidFill>
-                <a:latin typeface="Poppins" pitchFamily="34" charset="0"/>
-                <a:ea typeface="Poppins" pitchFamily="34" charset="-122"/>
-                <a:cs typeface="Poppins" pitchFamily="34" charset="-120"/>
-              </a:rPr>
-              <a:t>Jabiru Golf Club</a:t>
-            </a:r>
-            <a:endParaRPr lang="en-US" sz="720" dirty="0"/>
-          </a:p>
-        </p:txBody>
-      </p:sp>
-      <p:sp>
-        <p:nvSpPr>
-          <p:cNvPr id="142" name="Text 140"/>
-          <p:cNvSpPr txBox="1"/>
-          <p:nvPr/>
-        </p:nvSpPr>
-        <p:spPr>
-          <a:xfrm>
-            <a:off x="3374136" y="5770778"/>
-            <a:ext cx="1371600" cy="154534"/>
-          </a:xfrm>
-          <a:prstGeom prst="rect">
-            <a:avLst/>
-          </a:prstGeom>
-          <a:noFill/>
-          <a:ln/>
-        </p:spPr>
-        <p:txBody>
-          <a:bodyPr wrap="square" lIns="0" tIns="0" rIns="0" bIns="0" rtlCol="0" anchor="ctr"/>
-          <a:lstStyle/>
-          <a:p>
-            <a:pPr indent="0" marL="0">
-              <a:buNone/>
-            </a:pPr>
-            <a:r>
-              <a:rPr lang="en-US" sz="700" dirty="0">
-                <a:solidFill>
-                  <a:srgbClr val="5E7280"/>
-                </a:solidFill>
-                <a:latin typeface="Poppins" pitchFamily="34" charset="0"/>
-                <a:ea typeface="Poppins" pitchFamily="34" charset="-122"/>
-                <a:cs typeface="Poppins" pitchFamily="34" charset="-120"/>
-              </a:rPr>
-              <a:t>Bjorn Magabo</a:t>
-            </a:r>
-            <a:endParaRPr lang="en-US" sz="700" dirty="0"/>
-          </a:p>
-        </p:txBody>
-      </p:sp>
-      <p:sp>
-        <p:nvSpPr>
-          <p:cNvPr id="143" name="Text 141"/>
-          <p:cNvSpPr txBox="1"/>
-          <p:nvPr/>
-        </p:nvSpPr>
-        <p:spPr>
-          <a:xfrm>
-            <a:off x="4782312" y="5770778"/>
-            <a:ext cx="731520" cy="154534"/>
-          </a:xfrm>
-          <a:prstGeom prst="rect">
-            <a:avLst/>
-          </a:prstGeom>
-          <a:noFill/>
-          <a:ln/>
-        </p:spPr>
-        <p:txBody>
-          <a:bodyPr wrap="square" lIns="0" tIns="0" rIns="0" bIns="0" rtlCol="0" anchor="ctr"/>
-          <a:lstStyle/>
-          <a:p>
-            <a:pPr indent="0" marL="0">
-              <a:buNone/>
-            </a:pPr>
-            <a:r>
-              <a:rPr lang="en-US" sz="700" dirty="0">
-                <a:solidFill>
-                  <a:srgbClr val="8FA1AC"/>
-                </a:solidFill>
-                <a:latin typeface="Poppins" pitchFamily="34" charset="0"/>
-                <a:ea typeface="Poppins" pitchFamily="34" charset="-122"/>
-                <a:cs typeface="Poppins" pitchFamily="34" charset="-120"/>
-              </a:rPr>
-              <a:t>18 Sep</a:t>
-            </a:r>
-            <a:endParaRPr lang="en-US" sz="700" dirty="0"/>
-          </a:p>
-        </p:txBody>
-      </p:sp>
-      <p:sp>
-        <p:nvSpPr>
-          <p:cNvPr id="144" name="Text 142"/>
-          <p:cNvSpPr txBox="1"/>
-          <p:nvPr/>
-        </p:nvSpPr>
-        <p:spPr>
-          <a:xfrm>
-            <a:off x="5532120" y="5770778"/>
-            <a:ext cx="457200" cy="154534"/>
-          </a:xfrm>
-          <a:prstGeom prst="rect">
-            <a:avLst/>
-          </a:prstGeom>
-          <a:noFill/>
-          <a:ln/>
-        </p:spPr>
-        <p:txBody>
-          <a:bodyPr wrap="square" lIns="0" tIns="0" rIns="0" bIns="0" rtlCol="0" anchor="ctr"/>
-          <a:lstStyle/>
-          <a:p>
-            <a:pPr algn="r" indent="0" marL="0">
-              <a:buNone/>
-            </a:pPr>
-            <a:r>
-              <a:rPr lang="en-US" sz="720" b="1" dirty="0">
-                <a:solidFill>
-                  <a:srgbClr val="5E7280"/>
-                </a:solidFill>
-                <a:latin typeface="Poppins" pitchFamily="34" charset="0"/>
-                <a:ea typeface="Poppins" pitchFamily="34" charset="-122"/>
-                <a:cs typeface="Poppins" pitchFamily="34" charset="-120"/>
-              </a:rPr>
-              <a:t>30</a:t>
-            </a:r>
-            <a:endParaRPr lang="en-US" sz="720" dirty="0"/>
-          </a:p>
-        </p:txBody>
-      </p:sp>
-      <p:sp>
-        <p:nvSpPr>
-          <p:cNvPr id="145" name="Text 143"/>
-          <p:cNvSpPr txBox="1"/>
-          <p:nvPr/>
-        </p:nvSpPr>
-        <p:spPr>
-          <a:xfrm>
-            <a:off x="6025896" y="5770778"/>
-            <a:ext cx="768096" cy="154534"/>
-          </a:xfrm>
-          <a:prstGeom prst="rect">
-            <a:avLst/>
-          </a:prstGeom>
-          <a:noFill/>
-          <a:ln/>
-        </p:spPr>
-        <p:txBody>
-          <a:bodyPr wrap="square" lIns="0" tIns="0" rIns="0" bIns="0" rtlCol="0" anchor="ctr"/>
-          <a:lstStyle/>
-          <a:p>
-            <a:pPr algn="r" indent="0" marL="0">
-              <a:buNone/>
-            </a:pPr>
-            <a:r>
-              <a:rPr lang="en-US" sz="720" b="1" dirty="0">
-                <a:solidFill>
-                  <a:srgbClr val="12293A"/>
-                </a:solidFill>
-                <a:latin typeface="Poppins" pitchFamily="34" charset="0"/>
-                <a:ea typeface="Poppins" pitchFamily="34" charset="-122"/>
-                <a:cs typeface="Poppins" pitchFamily="34" charset="-120"/>
-              </a:rPr>
-              <a:t>$106</a:t>
-            </a:r>
-            <a:endParaRPr lang="en-US" sz="720" dirty="0"/>
-          </a:p>
-        </p:txBody>
-      </p:sp>
-      <p:sp>
-        <p:nvSpPr>
-          <p:cNvPr id="146" name="Shape 144"/>
-          <p:cNvSpPr/>
-          <p:nvPr/>
-        </p:nvSpPr>
-        <p:spPr>
-          <a:xfrm>
-            <a:off x="612648" y="5961888"/>
+            <a:off x="612648" y="5800954"/>
             <a:ext cx="6272784" cy="10973"/>
           </a:xfrm>
           <a:prstGeom prst="rect">
@@ -6165,13 +5755,13 @@
       </p:sp>
       <p:sp>
         <p:nvSpPr>
-          <p:cNvPr id="147" name="Text 145"/>
-          <p:cNvSpPr txBox="1"/>
-          <p:nvPr/>
-        </p:nvSpPr>
-        <p:spPr>
-          <a:xfrm>
-            <a:off x="612648" y="5998464"/>
+          <p:cNvPr id="136" name="Text 134"/>
+          <p:cNvSpPr txBox="1"/>
+          <p:nvPr/>
+        </p:nvSpPr>
+        <p:spPr>
+          <a:xfrm>
+            <a:off x="612648" y="5837530"/>
             <a:ext cx="1828800" cy="219456"/>
           </a:xfrm>
           <a:prstGeom prst="rect">
@@ -6204,13 +5794,13 @@
       </p:sp>
       <p:sp>
         <p:nvSpPr>
-          <p:cNvPr id="148" name="Text 146"/>
-          <p:cNvSpPr txBox="1"/>
-          <p:nvPr/>
-        </p:nvSpPr>
-        <p:spPr>
-          <a:xfrm>
-            <a:off x="5257800" y="5998464"/>
+          <p:cNvPr id="137" name="Text 135"/>
+          <p:cNvSpPr txBox="1"/>
+          <p:nvPr/>
+        </p:nvSpPr>
+        <p:spPr>
+          <a:xfrm>
+            <a:off x="5257800" y="5837530"/>
             <a:ext cx="1536192" cy="219456"/>
           </a:xfrm>
           <a:prstGeom prst="rect">
@@ -6235,7 +5825,7 @@
                 <a:ea typeface="Poppins" pitchFamily="34" charset="-122"/>
                 <a:cs typeface="Poppins" pitchFamily="34" charset="-120"/>
               </a:rPr>
-              <a:t>$20,038/mo</a:t>
+              <a:t>$19,450/mo</a:t>
             </a:r>
             <a:endParaRPr lang="en-US" sz="800" dirty="0"/>
           </a:p>
@@ -6243,7 +5833,7 @@
       </p:sp>
       <p:sp>
         <p:nvSpPr>
-          <p:cNvPr id="149" name="Shape 147"/>
+          <p:cNvPr id="138" name="Shape 136"/>
           <p:cNvSpPr/>
           <p:nvPr/>
         </p:nvSpPr>
@@ -6272,7 +5862,7 @@
       </p:sp>
       <p:sp>
         <p:nvSpPr>
-          <p:cNvPr id="150" name="Text 148"/>
+          <p:cNvPr id="139" name="Text 137"/>
           <p:cNvSpPr txBox="1"/>
           <p:nvPr/>
         </p:nvSpPr>
@@ -6311,7 +5901,7 @@
       </p:sp>
       <p:sp>
         <p:nvSpPr>
-          <p:cNvPr id="151" name="Text 149"/>
+          <p:cNvPr id="140" name="Text 138"/>
           <p:cNvSpPr txBox="1"/>
           <p:nvPr/>
         </p:nvSpPr>
@@ -6350,7 +5940,7 @@
       </p:sp>
       <p:sp>
         <p:nvSpPr>
-          <p:cNvPr id="152" name="Shape 150"/>
+          <p:cNvPr id="141" name="Shape 139"/>
           <p:cNvSpPr/>
           <p:nvPr/>
         </p:nvSpPr>
@@ -6370,7 +5960,7 @@
       </p:sp>
       <p:sp>
         <p:nvSpPr>
-          <p:cNvPr id="153" name="Text 151"/>
+          <p:cNvPr id="142" name="Text 140"/>
           <p:cNvSpPr txBox="1"/>
           <p:nvPr/>
         </p:nvSpPr>
@@ -6401,7 +5991,7 @@
                 <a:ea typeface="Poppins" pitchFamily="34" charset="-122"/>
                 <a:cs typeface="Poppins" pitchFamily="34" charset="-120"/>
               </a:rPr>
-              <a:t>10 deals</a:t>
+              <a:t>8 deals</a:t>
             </a:r>
             <a:endParaRPr lang="en-US" sz="680" dirty="0"/>
           </a:p>
@@ -6409,7 +5999,7 @@
       </p:sp>
       <p:sp>
         <p:nvSpPr>
-          <p:cNvPr id="154" name="Text 152"/>
+          <p:cNvPr id="143" name="Text 141"/>
           <p:cNvSpPr txBox="1"/>
           <p:nvPr/>
         </p:nvSpPr>
@@ -6440,7 +6030,7 @@
                 <a:ea typeface="Poppins" pitchFamily="34" charset="-122"/>
                 <a:cs typeface="Poppins" pitchFamily="34" charset="-120"/>
               </a:rPr>
-              <a:t>$3,989/mo</a:t>
+              <a:t>$3,401/mo</a:t>
             </a:r>
             <a:endParaRPr lang="en-US" sz="700" dirty="0"/>
           </a:p>
@@ -6448,7 +6038,7 @@
       </p:sp>
       <p:sp>
         <p:nvSpPr>
-          <p:cNvPr id="155" name="Text 153"/>
+          <p:cNvPr id="144" name="Text 142"/>
           <p:cNvSpPr txBox="1"/>
           <p:nvPr/>
         </p:nvSpPr>
@@ -6487,14 +6077,14 @@
       </p:sp>
       <p:sp>
         <p:nvSpPr>
-          <p:cNvPr id="156" name="Shape 154"/>
+          <p:cNvPr id="145" name="Shape 143"/>
           <p:cNvSpPr/>
           <p:nvPr/>
         </p:nvSpPr>
         <p:spPr>
           <a:xfrm>
             <a:off x="8458200" y="2875788"/>
-            <a:ext cx="480060" cy="100584"/>
+            <a:ext cx="600075" cy="100584"/>
           </a:xfrm>
           <a:prstGeom prst="rect">
             <a:avLst/>
@@ -6507,7 +6097,7 @@
       </p:sp>
       <p:sp>
         <p:nvSpPr>
-          <p:cNvPr id="157" name="Text 155"/>
+          <p:cNvPr id="146" name="Text 144"/>
           <p:cNvSpPr txBox="1"/>
           <p:nvPr/>
         </p:nvSpPr>
@@ -6546,7 +6136,7 @@
       </p:sp>
       <p:sp>
         <p:nvSpPr>
-          <p:cNvPr id="158" name="Text 156"/>
+          <p:cNvPr id="147" name="Text 145"/>
           <p:cNvSpPr txBox="1"/>
           <p:nvPr/>
         </p:nvSpPr>
@@ -6585,7 +6175,7 @@
       </p:sp>
       <p:sp>
         <p:nvSpPr>
-          <p:cNvPr id="159" name="Text 157"/>
+          <p:cNvPr id="148" name="Text 146"/>
           <p:cNvSpPr txBox="1"/>
           <p:nvPr/>
         </p:nvSpPr>
@@ -6624,14 +6214,14 @@
       </p:sp>
       <p:sp>
         <p:nvSpPr>
-          <p:cNvPr id="160" name="Shape 158"/>
+          <p:cNvPr id="149" name="Shape 147"/>
           <p:cNvSpPr/>
           <p:nvPr/>
         </p:nvSpPr>
         <p:spPr>
           <a:xfrm>
             <a:off x="8458200" y="3076956"/>
-            <a:ext cx="640080" cy="100584"/>
+            <a:ext cx="800100" cy="100584"/>
           </a:xfrm>
           <a:prstGeom prst="rect">
             <a:avLst/>
@@ -6644,7 +6234,7 @@
       </p:sp>
       <p:sp>
         <p:nvSpPr>
-          <p:cNvPr id="161" name="Text 159"/>
+          <p:cNvPr id="150" name="Text 148"/>
           <p:cNvSpPr txBox="1"/>
           <p:nvPr/>
         </p:nvSpPr>
@@ -6683,7 +6273,7 @@
       </p:sp>
       <p:sp>
         <p:nvSpPr>
-          <p:cNvPr id="162" name="Text 160"/>
+          <p:cNvPr id="151" name="Text 149"/>
           <p:cNvSpPr txBox="1"/>
           <p:nvPr/>
         </p:nvSpPr>
@@ -6722,7 +6312,7 @@
       </p:sp>
       <p:sp>
         <p:nvSpPr>
-          <p:cNvPr id="163" name="Text 161"/>
+          <p:cNvPr id="152" name="Text 150"/>
           <p:cNvSpPr txBox="1"/>
           <p:nvPr/>
         </p:nvSpPr>
@@ -6761,14 +6351,14 @@
       </p:sp>
       <p:sp>
         <p:nvSpPr>
-          <p:cNvPr id="164" name="Shape 162"/>
+          <p:cNvPr id="153" name="Shape 151"/>
           <p:cNvSpPr/>
           <p:nvPr/>
         </p:nvSpPr>
         <p:spPr>
           <a:xfrm>
             <a:off x="8458200" y="3278124"/>
-            <a:ext cx="480060" cy="100584"/>
+            <a:ext cx="600075" cy="100584"/>
           </a:xfrm>
           <a:prstGeom prst="rect">
             <a:avLst/>
@@ -6781,7 +6371,7 @@
       </p:sp>
       <p:sp>
         <p:nvSpPr>
-          <p:cNvPr id="165" name="Text 163"/>
+          <p:cNvPr id="154" name="Text 152"/>
           <p:cNvSpPr txBox="1"/>
           <p:nvPr/>
         </p:nvSpPr>
@@ -6820,7 +6410,7 @@
       </p:sp>
       <p:sp>
         <p:nvSpPr>
-          <p:cNvPr id="166" name="Text 164"/>
+          <p:cNvPr id="155" name="Text 153"/>
           <p:cNvSpPr txBox="1"/>
           <p:nvPr/>
         </p:nvSpPr>
@@ -6859,7 +6449,7 @@
       </p:sp>
       <p:sp>
         <p:nvSpPr>
-          <p:cNvPr id="167" name="Shape 165"/>
+          <p:cNvPr id="156" name="Shape 154"/>
           <p:cNvSpPr/>
           <p:nvPr/>
         </p:nvSpPr>
@@ -6888,7 +6478,7 @@
       </p:sp>
       <p:sp>
         <p:nvSpPr>
-          <p:cNvPr id="168" name="Text 166"/>
+          <p:cNvPr id="157" name="Text 155"/>
           <p:cNvSpPr txBox="1"/>
           <p:nvPr/>
         </p:nvSpPr>
@@ -6927,7 +6517,7 @@
       </p:sp>
       <p:sp>
         <p:nvSpPr>
-          <p:cNvPr id="169" name="Shape 167"/>
+          <p:cNvPr id="158" name="Shape 156"/>
           <p:cNvSpPr/>
           <p:nvPr/>
         </p:nvSpPr>
@@ -6947,7 +6537,7 @@
       </p:sp>
       <p:sp>
         <p:nvSpPr>
-          <p:cNvPr id="170" name="Text 168"/>
+          <p:cNvPr id="159" name="Text 157"/>
           <p:cNvSpPr txBox="1"/>
           <p:nvPr/>
         </p:nvSpPr>
@@ -6986,7 +6576,7 @@
       </p:sp>
       <p:sp>
         <p:nvSpPr>
-          <p:cNvPr id="171" name="Text 169"/>
+          <p:cNvPr id="160" name="Text 158"/>
           <p:cNvSpPr txBox="1"/>
           <p:nvPr/>
         </p:nvSpPr>
@@ -7025,7 +6615,7 @@
       </p:sp>
       <p:sp>
         <p:nvSpPr>
-          <p:cNvPr id="172" name="Shape 170"/>
+          <p:cNvPr id="161" name="Shape 159"/>
           <p:cNvSpPr/>
           <p:nvPr/>
         </p:nvSpPr>
@@ -7045,7 +6635,7 @@
       </p:sp>
       <p:sp>
         <p:nvSpPr>
-          <p:cNvPr id="173" name="Text 171"/>
+          <p:cNvPr id="162" name="Text 160"/>
           <p:cNvSpPr txBox="1"/>
           <p:nvPr/>
         </p:nvSpPr>
@@ -7084,7 +6674,7 @@
       </p:sp>
       <p:sp>
         <p:nvSpPr>
-          <p:cNvPr id="174" name="Text 172"/>
+          <p:cNvPr id="163" name="Text 161"/>
           <p:cNvSpPr txBox="1"/>
           <p:nvPr/>
         </p:nvSpPr>
@@ -7123,7 +6713,7 @@
       </p:sp>
       <p:sp>
         <p:nvSpPr>
-          <p:cNvPr id="175" name="Shape 173"/>
+          <p:cNvPr id="164" name="Shape 162"/>
           <p:cNvSpPr/>
           <p:nvPr/>
         </p:nvSpPr>
@@ -7143,7 +6733,7 @@
       </p:sp>
       <p:sp>
         <p:nvSpPr>
-          <p:cNvPr id="176" name="Text 174"/>
+          <p:cNvPr id="165" name="Text 163"/>
           <p:cNvSpPr txBox="1"/>
           <p:nvPr/>
         </p:nvSpPr>
@@ -7182,7 +6772,7 @@
       </p:sp>
       <p:sp>
         <p:nvSpPr>
-          <p:cNvPr id="177" name="Text 175"/>
+          <p:cNvPr id="166" name="Text 164"/>
           <p:cNvSpPr txBox="1"/>
           <p:nvPr/>
         </p:nvSpPr>
@@ -7221,7 +6811,7 @@
       </p:sp>
       <p:sp>
         <p:nvSpPr>
-          <p:cNvPr id="178" name="Text 176"/>
+          <p:cNvPr id="167" name="Text 165"/>
           <p:cNvSpPr txBox="1"/>
           <p:nvPr/>
         </p:nvSpPr>
@@ -7260,7 +6850,7 @@
       </p:sp>
       <p:sp>
         <p:nvSpPr>
-          <p:cNvPr id="179" name="Shape 177"/>
+          <p:cNvPr id="168" name="Shape 166"/>
           <p:cNvSpPr/>
           <p:nvPr/>
         </p:nvSpPr>
@@ -7289,7 +6879,7 @@
       </p:sp>
       <p:sp>
         <p:nvSpPr>
-          <p:cNvPr id="180" name="Text 178"/>
+          <p:cNvPr id="169" name="Text 167"/>
           <p:cNvSpPr txBox="1"/>
           <p:nvPr/>
         </p:nvSpPr>
@@ -7328,7 +6918,7 @@
       </p:sp>
       <p:sp>
         <p:nvSpPr>
-          <p:cNvPr id="181" name="Text 179"/>
+          <p:cNvPr id="170" name="Text 168"/>
           <p:cNvSpPr txBox="1"/>
           <p:nvPr/>
         </p:nvSpPr>
@@ -7373,7 +6963,7 @@
                 <a:ea typeface="Poppins" pitchFamily="34" charset="-122"/>
                 <a:cs typeface="Poppins" pitchFamily="34" charset="-120"/>
               </a:rPr>
-              <a:t>Three deals over six months old carry 68% of the value. </a:t>
+              <a:t>Three deals over six months old carry 70% of the value. </a:t>
             </a:r>
             <a:pPr indent="0" marL="0">
               <a:spcAft>
@@ -7390,7 +6980,7 @@
                 <a:ea typeface="Poppins" pitchFamily="34" charset="-122"/>
                 <a:cs typeface="Poppins" pitchFamily="34" charset="-120"/>
               </a:rPr>
-              <a:t>Oscars Group ($12,880/mo, 201 days), The Berrigan ($475, 209) and Riverton ($315, 184). Oscars alone is $155k of the $240k.</a:t>
+              <a:t>Oscars Group ($12,880/mo, 201 days), The Berrigan ($475, 209) and Riverton ($315, 184). Oscars alone is $155k of the $233k.</a:t>
             </a:r>
             <a:endParaRPr lang="en-US" sz="900" dirty="0"/>
           </a:p>
@@ -7421,7 +7011,7 @@
                 <a:ea typeface="Poppins" pitchFamily="34" charset="-122"/>
                 <a:cs typeface="Poppins" pitchFamily="34" charset="-120"/>
               </a:rPr>
-              <a:t>Strip those three and the rest is $6,368/mo across 17 venues, median 31 days. </a:t>
+              <a:t>Strip those three and the rest is $5,780/mo across 15 venues, median 31 days. </a:t>
             </a:r>
             <a:pPr indent="0" marL="0">
               <a:spcAft>
@@ -7438,7 +7028,7 @@
                 <a:ea typeface="Poppins" pitchFamily="34" charset="-122"/>
                 <a:cs typeface="Poppins" pitchFamily="34" charset="-120"/>
               </a:rPr>
-              <a:t>A normal delivery queue — but ten of the seventeen closed inside the last month, so it fills faster than it clears.</a:t>
+              <a:t>A normal delivery queue — but eight of the fifteen closed inside the last month, so it fills faster than it clears.</a:t>
             </a:r>
             <a:endParaRPr lang="en-US" sz="900" dirty="0"/>
           </a:p>
@@ -7446,7 +7036,7 @@
       </p:sp>
       <p:sp>
         <p:nvSpPr>
-          <p:cNvPr id="182" name="Text 180"/>
+          <p:cNvPr id="171" name="Text 169"/>
           <p:cNvSpPr txBox="1"/>
           <p:nvPr/>
         </p:nvSpPr>
@@ -7477,7 +7067,7 @@
                 <a:ea typeface="Poppins" pitchFamily="34" charset="-122"/>
                 <a:cs typeface="Poppins" pitchFamily="34" charset="-120"/>
               </a:rPr>
-              <a:t>Not yet billing = won with recurring revenue in 2026, no row on the register. A live venue is billing.</a:t>
+              <a:t>Not yet billing = won with recurring revenue in 2026, no row on the register. AVC parked licences excluded. A live venue is billing.</a:t>
             </a:r>
             <a:endParaRPr lang="en-US" sz="750" dirty="0"/>
           </a:p>
@@ -7485,7 +7075,7 @@
       </p:sp>
       <p:sp>
         <p:nvSpPr>
-          <p:cNvPr id="183" name="Shape 181"/>
+          <p:cNvPr id="172" name="Shape 170"/>
           <p:cNvSpPr/>
           <p:nvPr/>
         </p:nvSpPr>
@@ -7507,7 +7097,7 @@
       </p:sp>
       <p:sp>
         <p:nvSpPr>
-          <p:cNvPr id="184" name="Text 182"/>
+          <p:cNvPr id="173" name="Text 171"/>
           <p:cNvSpPr txBox="1"/>
           <p:nvPr/>
         </p:nvSpPr>
@@ -7538,7 +7128,7 @@
                 <a:ea typeface="Poppins" pitchFamily="34" charset="-122"/>
                 <a:cs typeface="Poppins" pitchFamily="34" charset="-120"/>
               </a:rPr>
-              <a:t>Source: HubSpot closed-won deals (total_software_cost) vs MRR movement register (live, 19 Oct) · as at 18 Oct</a:t>
+              <a:t>Source: HubSpot closed-won deals (total_software_cost, AVC excluded) vs MRR movement register (live, 19 Oct) · as at 18 Oct</a:t>
             </a:r>
             <a:endParaRPr lang="en-US" sz="700" dirty="0"/>
           </a:p>
